--- a/önlab/UTYEC2.pptx
+++ b/önlab/UTYEC2.pptx
@@ -9,8 +9,8 @@
     <p:sldId id="257" r:id="rId3"/>
     <p:sldId id="258" r:id="rId4"/>
     <p:sldId id="259" r:id="rId5"/>
-    <p:sldId id="263" r:id="rId6"/>
-    <p:sldId id="261" r:id="rId7"/>
+    <p:sldId id="264" r:id="rId6"/>
+    <p:sldId id="263" r:id="rId7"/>
     <p:sldId id="256" r:id="rId8"/>
   </p:sldIdLst>
   <p:sldSz cx="12192000" cy="6858000"/>
@@ -110,6 +110,11 @@
       </a:defRPr>
     </a:lvl9pPr>
   </p:defaultTextStyle>
+  <p:extLst>
+    <p:ext uri="{EFAFB233-063F-42B5-8137-9DF3F51BA10A}">
+      <p15:sldGuideLst xmlns:p15="http://schemas.microsoft.com/office/powerpoint/2012/main"/>
+    </p:ext>
+  </p:extLst>
 </p:presentation>
 </file>
 
@@ -304,7 +309,7 @@
           <a:p>
             <a:fld id="{64484362-F61F-4DFE-AF07-951D61763203}" type="datetimeFigureOut">
               <a:rPr lang="hu-HU" smtClean="0"/>
-              <a:t>2026. 06. 01.</a:t>
+              <a:t>2026. 06. 02.</a:t>
             </a:fld>
             <a:endParaRPr lang="hu-HU"/>
           </a:p>
@@ -740,7 +745,7 @@
           <a:p>
             <a:fld id="{64484362-F61F-4DFE-AF07-951D61763203}" type="datetimeFigureOut">
               <a:rPr lang="hu-HU" smtClean="0"/>
-              <a:t>2026. 06. 01.</a:t>
+              <a:t>2026. 06. 02.</a:t>
             </a:fld>
             <a:endParaRPr lang="hu-HU"/>
           </a:p>
@@ -990,7 +995,7 @@
           <a:p>
             <a:fld id="{64484362-F61F-4DFE-AF07-951D61763203}" type="datetimeFigureOut">
               <a:rPr lang="hu-HU" smtClean="0"/>
-              <a:t>2026. 06. 01.</a:t>
+              <a:t>2026. 06. 02.</a:t>
             </a:fld>
             <a:endParaRPr lang="hu-HU"/>
           </a:p>
@@ -1298,7 +1303,7 @@
           <a:p>
             <a:fld id="{64484362-F61F-4DFE-AF07-951D61763203}" type="datetimeFigureOut">
               <a:rPr lang="hu-HU" smtClean="0"/>
-              <a:t>2026. 06. 01.</a:t>
+              <a:t>2026. 06. 02.</a:t>
             </a:fld>
             <a:endParaRPr lang="hu-HU"/>
           </a:p>
@@ -1616,7 +1621,7 @@
           <a:p>
             <a:fld id="{64484362-F61F-4DFE-AF07-951D61763203}" type="datetimeFigureOut">
               <a:rPr lang="hu-HU" smtClean="0"/>
-              <a:t>2026. 06. 01.</a:t>
+              <a:t>2026. 06. 02.</a:t>
             </a:fld>
             <a:endParaRPr lang="hu-HU"/>
           </a:p>
@@ -1918,7 +1923,7 @@
           <a:p>
             <a:fld id="{64484362-F61F-4DFE-AF07-951D61763203}" type="datetimeFigureOut">
               <a:rPr lang="hu-HU" smtClean="0"/>
-              <a:t>2026. 06. 01.</a:t>
+              <a:t>2026. 06. 02.</a:t>
             </a:fld>
             <a:endParaRPr lang="hu-HU"/>
           </a:p>
@@ -2285,7 +2290,7 @@
           <a:p>
             <a:fld id="{64484362-F61F-4DFE-AF07-951D61763203}" type="datetimeFigureOut">
               <a:rPr lang="hu-HU" smtClean="0"/>
-              <a:t>2026. 06. 01.</a:t>
+              <a:t>2026. 06. 02.</a:t>
             </a:fld>
             <a:endParaRPr lang="hu-HU"/>
           </a:p>
@@ -2459,7 +2464,7 @@
           <a:p>
             <a:fld id="{64484362-F61F-4DFE-AF07-951D61763203}" type="datetimeFigureOut">
               <a:rPr lang="hu-HU" smtClean="0"/>
-              <a:t>2026. 06. 01.</a:t>
+              <a:t>2026. 06. 02.</a:t>
             </a:fld>
             <a:endParaRPr lang="hu-HU"/>
           </a:p>
@@ -2639,7 +2644,7 @@
           <a:p>
             <a:fld id="{64484362-F61F-4DFE-AF07-951D61763203}" type="datetimeFigureOut">
               <a:rPr lang="hu-HU" smtClean="0"/>
-              <a:t>2026. 06. 01.</a:t>
+              <a:t>2026. 06. 02.</a:t>
             </a:fld>
             <a:endParaRPr lang="hu-HU"/>
           </a:p>
@@ -2809,7 +2814,7 @@
           <a:p>
             <a:fld id="{64484362-F61F-4DFE-AF07-951D61763203}" type="datetimeFigureOut">
               <a:rPr lang="hu-HU" smtClean="0"/>
-              <a:t>2026. 06. 01.</a:t>
+              <a:t>2026. 06. 02.</a:t>
             </a:fld>
             <a:endParaRPr lang="hu-HU"/>
           </a:p>
@@ -3059,7 +3064,7 @@
           <a:p>
             <a:fld id="{64484362-F61F-4DFE-AF07-951D61763203}" type="datetimeFigureOut">
               <a:rPr lang="hu-HU" smtClean="0"/>
-              <a:t>2026. 06. 01.</a:t>
+              <a:t>2026. 06. 02.</a:t>
             </a:fld>
             <a:endParaRPr lang="hu-HU"/>
           </a:p>
@@ -3295,7 +3300,7 @@
           <a:p>
             <a:fld id="{64484362-F61F-4DFE-AF07-951D61763203}" type="datetimeFigureOut">
               <a:rPr lang="hu-HU" smtClean="0"/>
-              <a:t>2026. 06. 01.</a:t>
+              <a:t>2026. 06. 02.</a:t>
             </a:fld>
             <a:endParaRPr lang="hu-HU"/>
           </a:p>
@@ -3677,7 +3682,7 @@
           <a:p>
             <a:fld id="{64484362-F61F-4DFE-AF07-951D61763203}" type="datetimeFigureOut">
               <a:rPr lang="hu-HU" smtClean="0"/>
-              <a:t>2026. 06. 01.</a:t>
+              <a:t>2026. 06. 02.</a:t>
             </a:fld>
             <a:endParaRPr lang="hu-HU"/>
           </a:p>
@@ -3795,7 +3800,7 @@
           <a:p>
             <a:fld id="{64484362-F61F-4DFE-AF07-951D61763203}" type="datetimeFigureOut">
               <a:rPr lang="hu-HU" smtClean="0"/>
-              <a:t>2026. 06. 01.</a:t>
+              <a:t>2026. 06. 02.</a:t>
             </a:fld>
             <a:endParaRPr lang="hu-HU"/>
           </a:p>
@@ -3890,7 +3895,7 @@
           <a:p>
             <a:fld id="{64484362-F61F-4DFE-AF07-951D61763203}" type="datetimeFigureOut">
               <a:rPr lang="hu-HU" smtClean="0"/>
-              <a:t>2026. 06. 01.</a:t>
+              <a:t>2026. 06. 02.</a:t>
             </a:fld>
             <a:endParaRPr lang="hu-HU"/>
           </a:p>
@@ -4145,7 +4150,7 @@
           <a:p>
             <a:fld id="{64484362-F61F-4DFE-AF07-951D61763203}" type="datetimeFigureOut">
               <a:rPr lang="hu-HU" smtClean="0"/>
-              <a:t>2026. 06. 01.</a:t>
+              <a:t>2026. 06. 02.</a:t>
             </a:fld>
             <a:endParaRPr lang="hu-HU"/>
           </a:p>
@@ -4428,7 +4433,7 @@
           <a:p>
             <a:fld id="{64484362-F61F-4DFE-AF07-951D61763203}" type="datetimeFigureOut">
               <a:rPr lang="hu-HU" smtClean="0"/>
-              <a:t>2026. 06. 01.</a:t>
+              <a:t>2026. 06. 02.</a:t>
             </a:fld>
             <a:endParaRPr lang="hu-HU"/>
           </a:p>
@@ -4834,7 +4839,7 @@
           <a:p>
             <a:fld id="{64484362-F61F-4DFE-AF07-951D61763203}" type="datetimeFigureOut">
               <a:rPr lang="hu-HU" smtClean="0"/>
-              <a:t>2026. 06. 01.</a:t>
+              <a:t>2026. 06. 02.</a:t>
             </a:fld>
             <a:endParaRPr lang="hu-HU"/>
           </a:p>
@@ -5646,18 +5651,13 @@
               <a:buChar char="•"/>
             </a:pPr>
             <a:r>
-              <a:rPr lang="hu-HU" sz="1900" dirty="0" err="1">
+              <a:rPr lang="hu-HU" sz="1900" dirty="0">
                 <a:solidFill>
                   <a:schemeClr val="tx1"/>
                 </a:solidFill>
               </a:rPr>
-              <a:t>Lehűtésszupravezetésig</a:t>
-            </a:r>
-            <a:endParaRPr lang="hu-HU" sz="1900" dirty="0">
-              <a:solidFill>
-                <a:schemeClr val="tx1"/>
-              </a:solidFill>
-            </a:endParaRPr>
+              <a:t>Lehűtés szupravezetésig</a:t>
+            </a:r>
           </a:p>
           <a:p>
             <a:pPr marL="742950" lvl="1" indent="-285750">
@@ -5832,6 +5832,1025 @@
   <p:clrMapOvr>
     <a:masterClrMapping/>
   </p:clrMapOvr>
+  <p:timing>
+    <p:tnLst>
+      <p:par>
+        <p:cTn id="1" dur="indefinite" restart="never" nodeType="tmRoot">
+          <p:childTnLst>
+            <p:seq concurrent="1" nextAc="seek">
+              <p:cTn id="2" dur="indefinite" nodeType="mainSeq">
+                <p:childTnLst>
+                  <p:par>
+                    <p:cTn id="3" fill="hold">
+                      <p:stCondLst>
+                        <p:cond delay="indefinite"/>
+                      </p:stCondLst>
+                      <p:childTnLst>
+                        <p:par>
+                          <p:cTn id="4" fill="hold">
+                            <p:stCondLst>
+                              <p:cond delay="0"/>
+                            </p:stCondLst>
+                            <p:childTnLst>
+                              <p:par>
+                                <p:cTn id="5" presetID="2" presetClass="entr" presetSubtype="4" fill="hold" nodeType="clickEffect">
+                                  <p:stCondLst>
+                                    <p:cond delay="0"/>
+                                  </p:stCondLst>
+                                  <p:childTnLst>
+                                    <p:set>
+                                      <p:cBhvr>
+                                        <p:cTn id="6" dur="1" fill="hold">
+                                          <p:stCondLst>
+                                            <p:cond delay="0"/>
+                                          </p:stCondLst>
+                                        </p:cTn>
+                                        <p:tgtEl>
+                                          <p:spTgt spid="4">
+                                            <p:txEl>
+                                              <p:pRg st="0" end="0"/>
+                                            </p:txEl>
+                                          </p:spTgt>
+                                        </p:tgtEl>
+                                        <p:attrNameLst>
+                                          <p:attrName>style.visibility</p:attrName>
+                                        </p:attrNameLst>
+                                      </p:cBhvr>
+                                      <p:to>
+                                        <p:strVal val="visible"/>
+                                      </p:to>
+                                    </p:set>
+                                    <p:anim calcmode="lin" valueType="num">
+                                      <p:cBhvr additive="base">
+                                        <p:cTn id="7" dur="500" fill="hold"/>
+                                        <p:tgtEl>
+                                          <p:spTgt spid="4">
+                                            <p:txEl>
+                                              <p:pRg st="0" end="0"/>
+                                            </p:txEl>
+                                          </p:spTgt>
+                                        </p:tgtEl>
+                                        <p:attrNameLst>
+                                          <p:attrName>ppt_x</p:attrName>
+                                        </p:attrNameLst>
+                                      </p:cBhvr>
+                                      <p:tavLst>
+                                        <p:tav tm="0">
+                                          <p:val>
+                                            <p:strVal val="#ppt_x"/>
+                                          </p:val>
+                                        </p:tav>
+                                        <p:tav tm="100000">
+                                          <p:val>
+                                            <p:strVal val="#ppt_x"/>
+                                          </p:val>
+                                        </p:tav>
+                                      </p:tavLst>
+                                    </p:anim>
+                                    <p:anim calcmode="lin" valueType="num">
+                                      <p:cBhvr additive="base">
+                                        <p:cTn id="8" dur="500" fill="hold"/>
+                                        <p:tgtEl>
+                                          <p:spTgt spid="4">
+                                            <p:txEl>
+                                              <p:pRg st="0" end="0"/>
+                                            </p:txEl>
+                                          </p:spTgt>
+                                        </p:tgtEl>
+                                        <p:attrNameLst>
+                                          <p:attrName>ppt_y</p:attrName>
+                                        </p:attrNameLst>
+                                      </p:cBhvr>
+                                      <p:tavLst>
+                                        <p:tav tm="0">
+                                          <p:val>
+                                            <p:strVal val="1+#ppt_h/2"/>
+                                          </p:val>
+                                        </p:tav>
+                                        <p:tav tm="100000">
+                                          <p:val>
+                                            <p:strVal val="#ppt_y"/>
+                                          </p:val>
+                                        </p:tav>
+                                      </p:tavLst>
+                                    </p:anim>
+                                  </p:childTnLst>
+                                </p:cTn>
+                              </p:par>
+                            </p:childTnLst>
+                          </p:cTn>
+                        </p:par>
+                      </p:childTnLst>
+                    </p:cTn>
+                  </p:par>
+                  <p:par>
+                    <p:cTn id="9" fill="hold">
+                      <p:stCondLst>
+                        <p:cond delay="indefinite"/>
+                      </p:stCondLst>
+                      <p:childTnLst>
+                        <p:par>
+                          <p:cTn id="10" fill="hold">
+                            <p:stCondLst>
+                              <p:cond delay="0"/>
+                            </p:stCondLst>
+                            <p:childTnLst>
+                              <p:par>
+                                <p:cTn id="11" presetID="2" presetClass="entr" presetSubtype="4" fill="hold" nodeType="clickEffect">
+                                  <p:stCondLst>
+                                    <p:cond delay="0"/>
+                                  </p:stCondLst>
+                                  <p:childTnLst>
+                                    <p:set>
+                                      <p:cBhvr>
+                                        <p:cTn id="12" dur="1" fill="hold">
+                                          <p:stCondLst>
+                                            <p:cond delay="0"/>
+                                          </p:stCondLst>
+                                        </p:cTn>
+                                        <p:tgtEl>
+                                          <p:spTgt spid="4">
+                                            <p:txEl>
+                                              <p:pRg st="1" end="1"/>
+                                            </p:txEl>
+                                          </p:spTgt>
+                                        </p:tgtEl>
+                                        <p:attrNameLst>
+                                          <p:attrName>style.visibility</p:attrName>
+                                        </p:attrNameLst>
+                                      </p:cBhvr>
+                                      <p:to>
+                                        <p:strVal val="visible"/>
+                                      </p:to>
+                                    </p:set>
+                                    <p:anim calcmode="lin" valueType="num">
+                                      <p:cBhvr additive="base">
+                                        <p:cTn id="13" dur="500" fill="hold"/>
+                                        <p:tgtEl>
+                                          <p:spTgt spid="4">
+                                            <p:txEl>
+                                              <p:pRg st="1" end="1"/>
+                                            </p:txEl>
+                                          </p:spTgt>
+                                        </p:tgtEl>
+                                        <p:attrNameLst>
+                                          <p:attrName>ppt_x</p:attrName>
+                                        </p:attrNameLst>
+                                      </p:cBhvr>
+                                      <p:tavLst>
+                                        <p:tav tm="0">
+                                          <p:val>
+                                            <p:strVal val="#ppt_x"/>
+                                          </p:val>
+                                        </p:tav>
+                                        <p:tav tm="100000">
+                                          <p:val>
+                                            <p:strVal val="#ppt_x"/>
+                                          </p:val>
+                                        </p:tav>
+                                      </p:tavLst>
+                                    </p:anim>
+                                    <p:anim calcmode="lin" valueType="num">
+                                      <p:cBhvr additive="base">
+                                        <p:cTn id="14" dur="500" fill="hold"/>
+                                        <p:tgtEl>
+                                          <p:spTgt spid="4">
+                                            <p:txEl>
+                                              <p:pRg st="1" end="1"/>
+                                            </p:txEl>
+                                          </p:spTgt>
+                                        </p:tgtEl>
+                                        <p:attrNameLst>
+                                          <p:attrName>ppt_y</p:attrName>
+                                        </p:attrNameLst>
+                                      </p:cBhvr>
+                                      <p:tavLst>
+                                        <p:tav tm="0">
+                                          <p:val>
+                                            <p:strVal val="1+#ppt_h/2"/>
+                                          </p:val>
+                                        </p:tav>
+                                        <p:tav tm="100000">
+                                          <p:val>
+                                            <p:strVal val="#ppt_y"/>
+                                          </p:val>
+                                        </p:tav>
+                                      </p:tavLst>
+                                    </p:anim>
+                                  </p:childTnLst>
+                                </p:cTn>
+                              </p:par>
+                              <p:par>
+                                <p:cTn id="15" presetID="2" presetClass="entr" presetSubtype="4" fill="hold" nodeType="withEffect">
+                                  <p:stCondLst>
+                                    <p:cond delay="0"/>
+                                  </p:stCondLst>
+                                  <p:childTnLst>
+                                    <p:set>
+                                      <p:cBhvr>
+                                        <p:cTn id="16" dur="1" fill="hold">
+                                          <p:stCondLst>
+                                            <p:cond delay="0"/>
+                                          </p:stCondLst>
+                                        </p:cTn>
+                                        <p:tgtEl>
+                                          <p:spTgt spid="4">
+                                            <p:txEl>
+                                              <p:pRg st="2" end="2"/>
+                                            </p:txEl>
+                                          </p:spTgt>
+                                        </p:tgtEl>
+                                        <p:attrNameLst>
+                                          <p:attrName>style.visibility</p:attrName>
+                                        </p:attrNameLst>
+                                      </p:cBhvr>
+                                      <p:to>
+                                        <p:strVal val="visible"/>
+                                      </p:to>
+                                    </p:set>
+                                    <p:anim calcmode="lin" valueType="num">
+                                      <p:cBhvr additive="base">
+                                        <p:cTn id="17" dur="500" fill="hold"/>
+                                        <p:tgtEl>
+                                          <p:spTgt spid="4">
+                                            <p:txEl>
+                                              <p:pRg st="2" end="2"/>
+                                            </p:txEl>
+                                          </p:spTgt>
+                                        </p:tgtEl>
+                                        <p:attrNameLst>
+                                          <p:attrName>ppt_x</p:attrName>
+                                        </p:attrNameLst>
+                                      </p:cBhvr>
+                                      <p:tavLst>
+                                        <p:tav tm="0">
+                                          <p:val>
+                                            <p:strVal val="#ppt_x"/>
+                                          </p:val>
+                                        </p:tav>
+                                        <p:tav tm="100000">
+                                          <p:val>
+                                            <p:strVal val="#ppt_x"/>
+                                          </p:val>
+                                        </p:tav>
+                                      </p:tavLst>
+                                    </p:anim>
+                                    <p:anim calcmode="lin" valueType="num">
+                                      <p:cBhvr additive="base">
+                                        <p:cTn id="18" dur="500" fill="hold"/>
+                                        <p:tgtEl>
+                                          <p:spTgt spid="4">
+                                            <p:txEl>
+                                              <p:pRg st="2" end="2"/>
+                                            </p:txEl>
+                                          </p:spTgt>
+                                        </p:tgtEl>
+                                        <p:attrNameLst>
+                                          <p:attrName>ppt_y</p:attrName>
+                                        </p:attrNameLst>
+                                      </p:cBhvr>
+                                      <p:tavLst>
+                                        <p:tav tm="0">
+                                          <p:val>
+                                            <p:strVal val="1+#ppt_h/2"/>
+                                          </p:val>
+                                        </p:tav>
+                                        <p:tav tm="100000">
+                                          <p:val>
+                                            <p:strVal val="#ppt_y"/>
+                                          </p:val>
+                                        </p:tav>
+                                      </p:tavLst>
+                                    </p:anim>
+                                  </p:childTnLst>
+                                </p:cTn>
+                              </p:par>
+                              <p:par>
+                                <p:cTn id="19" presetID="2" presetClass="entr" presetSubtype="4" fill="hold" nodeType="withEffect">
+                                  <p:stCondLst>
+                                    <p:cond delay="0"/>
+                                  </p:stCondLst>
+                                  <p:childTnLst>
+                                    <p:set>
+                                      <p:cBhvr>
+                                        <p:cTn id="20" dur="1" fill="hold">
+                                          <p:stCondLst>
+                                            <p:cond delay="0"/>
+                                          </p:stCondLst>
+                                        </p:cTn>
+                                        <p:tgtEl>
+                                          <p:spTgt spid="4">
+                                            <p:txEl>
+                                              <p:pRg st="3" end="3"/>
+                                            </p:txEl>
+                                          </p:spTgt>
+                                        </p:tgtEl>
+                                        <p:attrNameLst>
+                                          <p:attrName>style.visibility</p:attrName>
+                                        </p:attrNameLst>
+                                      </p:cBhvr>
+                                      <p:to>
+                                        <p:strVal val="visible"/>
+                                      </p:to>
+                                    </p:set>
+                                    <p:anim calcmode="lin" valueType="num">
+                                      <p:cBhvr additive="base">
+                                        <p:cTn id="21" dur="500" fill="hold"/>
+                                        <p:tgtEl>
+                                          <p:spTgt spid="4">
+                                            <p:txEl>
+                                              <p:pRg st="3" end="3"/>
+                                            </p:txEl>
+                                          </p:spTgt>
+                                        </p:tgtEl>
+                                        <p:attrNameLst>
+                                          <p:attrName>ppt_x</p:attrName>
+                                        </p:attrNameLst>
+                                      </p:cBhvr>
+                                      <p:tavLst>
+                                        <p:tav tm="0">
+                                          <p:val>
+                                            <p:strVal val="#ppt_x"/>
+                                          </p:val>
+                                        </p:tav>
+                                        <p:tav tm="100000">
+                                          <p:val>
+                                            <p:strVal val="#ppt_x"/>
+                                          </p:val>
+                                        </p:tav>
+                                      </p:tavLst>
+                                    </p:anim>
+                                    <p:anim calcmode="lin" valueType="num">
+                                      <p:cBhvr additive="base">
+                                        <p:cTn id="22" dur="500" fill="hold"/>
+                                        <p:tgtEl>
+                                          <p:spTgt spid="4">
+                                            <p:txEl>
+                                              <p:pRg st="3" end="3"/>
+                                            </p:txEl>
+                                          </p:spTgt>
+                                        </p:tgtEl>
+                                        <p:attrNameLst>
+                                          <p:attrName>ppt_y</p:attrName>
+                                        </p:attrNameLst>
+                                      </p:cBhvr>
+                                      <p:tavLst>
+                                        <p:tav tm="0">
+                                          <p:val>
+                                            <p:strVal val="1+#ppt_h/2"/>
+                                          </p:val>
+                                        </p:tav>
+                                        <p:tav tm="100000">
+                                          <p:val>
+                                            <p:strVal val="#ppt_y"/>
+                                          </p:val>
+                                        </p:tav>
+                                      </p:tavLst>
+                                    </p:anim>
+                                  </p:childTnLst>
+                                </p:cTn>
+                              </p:par>
+                              <p:par>
+                                <p:cTn id="23" presetID="2" presetClass="entr" presetSubtype="4" fill="hold" nodeType="withEffect">
+                                  <p:stCondLst>
+                                    <p:cond delay="0"/>
+                                  </p:stCondLst>
+                                  <p:childTnLst>
+                                    <p:set>
+                                      <p:cBhvr>
+                                        <p:cTn id="24" dur="1" fill="hold">
+                                          <p:stCondLst>
+                                            <p:cond delay="0"/>
+                                          </p:stCondLst>
+                                        </p:cTn>
+                                        <p:tgtEl>
+                                          <p:spTgt spid="4">
+                                            <p:txEl>
+                                              <p:pRg st="4" end="4"/>
+                                            </p:txEl>
+                                          </p:spTgt>
+                                        </p:tgtEl>
+                                        <p:attrNameLst>
+                                          <p:attrName>style.visibility</p:attrName>
+                                        </p:attrNameLst>
+                                      </p:cBhvr>
+                                      <p:to>
+                                        <p:strVal val="visible"/>
+                                      </p:to>
+                                    </p:set>
+                                    <p:anim calcmode="lin" valueType="num">
+                                      <p:cBhvr additive="base">
+                                        <p:cTn id="25" dur="500" fill="hold"/>
+                                        <p:tgtEl>
+                                          <p:spTgt spid="4">
+                                            <p:txEl>
+                                              <p:pRg st="4" end="4"/>
+                                            </p:txEl>
+                                          </p:spTgt>
+                                        </p:tgtEl>
+                                        <p:attrNameLst>
+                                          <p:attrName>ppt_x</p:attrName>
+                                        </p:attrNameLst>
+                                      </p:cBhvr>
+                                      <p:tavLst>
+                                        <p:tav tm="0">
+                                          <p:val>
+                                            <p:strVal val="#ppt_x"/>
+                                          </p:val>
+                                        </p:tav>
+                                        <p:tav tm="100000">
+                                          <p:val>
+                                            <p:strVal val="#ppt_x"/>
+                                          </p:val>
+                                        </p:tav>
+                                      </p:tavLst>
+                                    </p:anim>
+                                    <p:anim calcmode="lin" valueType="num">
+                                      <p:cBhvr additive="base">
+                                        <p:cTn id="26" dur="500" fill="hold"/>
+                                        <p:tgtEl>
+                                          <p:spTgt spid="4">
+                                            <p:txEl>
+                                              <p:pRg st="4" end="4"/>
+                                            </p:txEl>
+                                          </p:spTgt>
+                                        </p:tgtEl>
+                                        <p:attrNameLst>
+                                          <p:attrName>ppt_y</p:attrName>
+                                        </p:attrNameLst>
+                                      </p:cBhvr>
+                                      <p:tavLst>
+                                        <p:tav tm="0">
+                                          <p:val>
+                                            <p:strVal val="1+#ppt_h/2"/>
+                                          </p:val>
+                                        </p:tav>
+                                        <p:tav tm="100000">
+                                          <p:val>
+                                            <p:strVal val="#ppt_y"/>
+                                          </p:val>
+                                        </p:tav>
+                                      </p:tavLst>
+                                    </p:anim>
+                                  </p:childTnLst>
+                                </p:cTn>
+                              </p:par>
+                              <p:par>
+                                <p:cTn id="27" presetID="2" presetClass="entr" presetSubtype="4" fill="hold" nodeType="withEffect">
+                                  <p:stCondLst>
+                                    <p:cond delay="0"/>
+                                  </p:stCondLst>
+                                  <p:childTnLst>
+                                    <p:set>
+                                      <p:cBhvr>
+                                        <p:cTn id="28" dur="1" fill="hold">
+                                          <p:stCondLst>
+                                            <p:cond delay="0"/>
+                                          </p:stCondLst>
+                                        </p:cTn>
+                                        <p:tgtEl>
+                                          <p:spTgt spid="4">
+                                            <p:txEl>
+                                              <p:pRg st="5" end="5"/>
+                                            </p:txEl>
+                                          </p:spTgt>
+                                        </p:tgtEl>
+                                        <p:attrNameLst>
+                                          <p:attrName>style.visibility</p:attrName>
+                                        </p:attrNameLst>
+                                      </p:cBhvr>
+                                      <p:to>
+                                        <p:strVal val="visible"/>
+                                      </p:to>
+                                    </p:set>
+                                    <p:anim calcmode="lin" valueType="num">
+                                      <p:cBhvr additive="base">
+                                        <p:cTn id="29" dur="500" fill="hold"/>
+                                        <p:tgtEl>
+                                          <p:spTgt spid="4">
+                                            <p:txEl>
+                                              <p:pRg st="5" end="5"/>
+                                            </p:txEl>
+                                          </p:spTgt>
+                                        </p:tgtEl>
+                                        <p:attrNameLst>
+                                          <p:attrName>ppt_x</p:attrName>
+                                        </p:attrNameLst>
+                                      </p:cBhvr>
+                                      <p:tavLst>
+                                        <p:tav tm="0">
+                                          <p:val>
+                                            <p:strVal val="#ppt_x"/>
+                                          </p:val>
+                                        </p:tav>
+                                        <p:tav tm="100000">
+                                          <p:val>
+                                            <p:strVal val="#ppt_x"/>
+                                          </p:val>
+                                        </p:tav>
+                                      </p:tavLst>
+                                    </p:anim>
+                                    <p:anim calcmode="lin" valueType="num">
+                                      <p:cBhvr additive="base">
+                                        <p:cTn id="30" dur="500" fill="hold"/>
+                                        <p:tgtEl>
+                                          <p:spTgt spid="4">
+                                            <p:txEl>
+                                              <p:pRg st="5" end="5"/>
+                                            </p:txEl>
+                                          </p:spTgt>
+                                        </p:tgtEl>
+                                        <p:attrNameLst>
+                                          <p:attrName>ppt_y</p:attrName>
+                                        </p:attrNameLst>
+                                      </p:cBhvr>
+                                      <p:tavLst>
+                                        <p:tav tm="0">
+                                          <p:val>
+                                            <p:strVal val="1+#ppt_h/2"/>
+                                          </p:val>
+                                        </p:tav>
+                                        <p:tav tm="100000">
+                                          <p:val>
+                                            <p:strVal val="#ppt_y"/>
+                                          </p:val>
+                                        </p:tav>
+                                      </p:tavLst>
+                                    </p:anim>
+                                  </p:childTnLst>
+                                </p:cTn>
+                              </p:par>
+                            </p:childTnLst>
+                          </p:cTn>
+                        </p:par>
+                      </p:childTnLst>
+                    </p:cTn>
+                  </p:par>
+                  <p:par>
+                    <p:cTn id="31" fill="hold">
+                      <p:stCondLst>
+                        <p:cond delay="indefinite"/>
+                      </p:stCondLst>
+                      <p:childTnLst>
+                        <p:par>
+                          <p:cTn id="32" fill="hold">
+                            <p:stCondLst>
+                              <p:cond delay="0"/>
+                            </p:stCondLst>
+                            <p:childTnLst>
+                              <p:par>
+                                <p:cTn id="33" presetID="2" presetClass="entr" presetSubtype="4" fill="hold" nodeType="clickEffect">
+                                  <p:stCondLst>
+                                    <p:cond delay="0"/>
+                                  </p:stCondLst>
+                                  <p:childTnLst>
+                                    <p:set>
+                                      <p:cBhvr>
+                                        <p:cTn id="34" dur="1" fill="hold">
+                                          <p:stCondLst>
+                                            <p:cond delay="0"/>
+                                          </p:stCondLst>
+                                        </p:cTn>
+                                        <p:tgtEl>
+                                          <p:spTgt spid="4">
+                                            <p:txEl>
+                                              <p:pRg st="6" end="6"/>
+                                            </p:txEl>
+                                          </p:spTgt>
+                                        </p:tgtEl>
+                                        <p:attrNameLst>
+                                          <p:attrName>style.visibility</p:attrName>
+                                        </p:attrNameLst>
+                                      </p:cBhvr>
+                                      <p:to>
+                                        <p:strVal val="visible"/>
+                                      </p:to>
+                                    </p:set>
+                                    <p:anim calcmode="lin" valueType="num">
+                                      <p:cBhvr additive="base">
+                                        <p:cTn id="35" dur="500" fill="hold"/>
+                                        <p:tgtEl>
+                                          <p:spTgt spid="4">
+                                            <p:txEl>
+                                              <p:pRg st="6" end="6"/>
+                                            </p:txEl>
+                                          </p:spTgt>
+                                        </p:tgtEl>
+                                        <p:attrNameLst>
+                                          <p:attrName>ppt_x</p:attrName>
+                                        </p:attrNameLst>
+                                      </p:cBhvr>
+                                      <p:tavLst>
+                                        <p:tav tm="0">
+                                          <p:val>
+                                            <p:strVal val="#ppt_x"/>
+                                          </p:val>
+                                        </p:tav>
+                                        <p:tav tm="100000">
+                                          <p:val>
+                                            <p:strVal val="#ppt_x"/>
+                                          </p:val>
+                                        </p:tav>
+                                      </p:tavLst>
+                                    </p:anim>
+                                    <p:anim calcmode="lin" valueType="num">
+                                      <p:cBhvr additive="base">
+                                        <p:cTn id="36" dur="500" fill="hold"/>
+                                        <p:tgtEl>
+                                          <p:spTgt spid="4">
+                                            <p:txEl>
+                                              <p:pRg st="6" end="6"/>
+                                            </p:txEl>
+                                          </p:spTgt>
+                                        </p:tgtEl>
+                                        <p:attrNameLst>
+                                          <p:attrName>ppt_y</p:attrName>
+                                        </p:attrNameLst>
+                                      </p:cBhvr>
+                                      <p:tavLst>
+                                        <p:tav tm="0">
+                                          <p:val>
+                                            <p:strVal val="1+#ppt_h/2"/>
+                                          </p:val>
+                                        </p:tav>
+                                        <p:tav tm="100000">
+                                          <p:val>
+                                            <p:strVal val="#ppt_y"/>
+                                          </p:val>
+                                        </p:tav>
+                                      </p:tavLst>
+                                    </p:anim>
+                                  </p:childTnLst>
+                                </p:cTn>
+                              </p:par>
+                              <p:par>
+                                <p:cTn id="37" presetID="2" presetClass="entr" presetSubtype="4" fill="hold" nodeType="withEffect">
+                                  <p:stCondLst>
+                                    <p:cond delay="0"/>
+                                  </p:stCondLst>
+                                  <p:childTnLst>
+                                    <p:set>
+                                      <p:cBhvr>
+                                        <p:cTn id="38" dur="1" fill="hold">
+                                          <p:stCondLst>
+                                            <p:cond delay="0"/>
+                                          </p:stCondLst>
+                                        </p:cTn>
+                                        <p:tgtEl>
+                                          <p:spTgt spid="4">
+                                            <p:txEl>
+                                              <p:pRg st="7" end="7"/>
+                                            </p:txEl>
+                                          </p:spTgt>
+                                        </p:tgtEl>
+                                        <p:attrNameLst>
+                                          <p:attrName>style.visibility</p:attrName>
+                                        </p:attrNameLst>
+                                      </p:cBhvr>
+                                      <p:to>
+                                        <p:strVal val="visible"/>
+                                      </p:to>
+                                    </p:set>
+                                    <p:anim calcmode="lin" valueType="num">
+                                      <p:cBhvr additive="base">
+                                        <p:cTn id="39" dur="500" fill="hold"/>
+                                        <p:tgtEl>
+                                          <p:spTgt spid="4">
+                                            <p:txEl>
+                                              <p:pRg st="7" end="7"/>
+                                            </p:txEl>
+                                          </p:spTgt>
+                                        </p:tgtEl>
+                                        <p:attrNameLst>
+                                          <p:attrName>ppt_x</p:attrName>
+                                        </p:attrNameLst>
+                                      </p:cBhvr>
+                                      <p:tavLst>
+                                        <p:tav tm="0">
+                                          <p:val>
+                                            <p:strVal val="#ppt_x"/>
+                                          </p:val>
+                                        </p:tav>
+                                        <p:tav tm="100000">
+                                          <p:val>
+                                            <p:strVal val="#ppt_x"/>
+                                          </p:val>
+                                        </p:tav>
+                                      </p:tavLst>
+                                    </p:anim>
+                                    <p:anim calcmode="lin" valueType="num">
+                                      <p:cBhvr additive="base">
+                                        <p:cTn id="40" dur="500" fill="hold"/>
+                                        <p:tgtEl>
+                                          <p:spTgt spid="4">
+                                            <p:txEl>
+                                              <p:pRg st="7" end="7"/>
+                                            </p:txEl>
+                                          </p:spTgt>
+                                        </p:tgtEl>
+                                        <p:attrNameLst>
+                                          <p:attrName>ppt_y</p:attrName>
+                                        </p:attrNameLst>
+                                      </p:cBhvr>
+                                      <p:tavLst>
+                                        <p:tav tm="0">
+                                          <p:val>
+                                            <p:strVal val="1+#ppt_h/2"/>
+                                          </p:val>
+                                        </p:tav>
+                                        <p:tav tm="100000">
+                                          <p:val>
+                                            <p:strVal val="#ppt_y"/>
+                                          </p:val>
+                                        </p:tav>
+                                      </p:tavLst>
+                                    </p:anim>
+                                  </p:childTnLst>
+                                </p:cTn>
+                              </p:par>
+                              <p:par>
+                                <p:cTn id="41" presetID="2" presetClass="entr" presetSubtype="4" fill="hold" nodeType="withEffect">
+                                  <p:stCondLst>
+                                    <p:cond delay="0"/>
+                                  </p:stCondLst>
+                                  <p:childTnLst>
+                                    <p:set>
+                                      <p:cBhvr>
+                                        <p:cTn id="42" dur="1" fill="hold">
+                                          <p:stCondLst>
+                                            <p:cond delay="0"/>
+                                          </p:stCondLst>
+                                        </p:cTn>
+                                        <p:tgtEl>
+                                          <p:spTgt spid="4">
+                                            <p:txEl>
+                                              <p:pRg st="8" end="8"/>
+                                            </p:txEl>
+                                          </p:spTgt>
+                                        </p:tgtEl>
+                                        <p:attrNameLst>
+                                          <p:attrName>style.visibility</p:attrName>
+                                        </p:attrNameLst>
+                                      </p:cBhvr>
+                                      <p:to>
+                                        <p:strVal val="visible"/>
+                                      </p:to>
+                                    </p:set>
+                                    <p:anim calcmode="lin" valueType="num">
+                                      <p:cBhvr additive="base">
+                                        <p:cTn id="43" dur="500" fill="hold"/>
+                                        <p:tgtEl>
+                                          <p:spTgt spid="4">
+                                            <p:txEl>
+                                              <p:pRg st="8" end="8"/>
+                                            </p:txEl>
+                                          </p:spTgt>
+                                        </p:tgtEl>
+                                        <p:attrNameLst>
+                                          <p:attrName>ppt_x</p:attrName>
+                                        </p:attrNameLst>
+                                      </p:cBhvr>
+                                      <p:tavLst>
+                                        <p:tav tm="0">
+                                          <p:val>
+                                            <p:strVal val="#ppt_x"/>
+                                          </p:val>
+                                        </p:tav>
+                                        <p:tav tm="100000">
+                                          <p:val>
+                                            <p:strVal val="#ppt_x"/>
+                                          </p:val>
+                                        </p:tav>
+                                      </p:tavLst>
+                                    </p:anim>
+                                    <p:anim calcmode="lin" valueType="num">
+                                      <p:cBhvr additive="base">
+                                        <p:cTn id="44" dur="500" fill="hold"/>
+                                        <p:tgtEl>
+                                          <p:spTgt spid="4">
+                                            <p:txEl>
+                                              <p:pRg st="8" end="8"/>
+                                            </p:txEl>
+                                          </p:spTgt>
+                                        </p:tgtEl>
+                                        <p:attrNameLst>
+                                          <p:attrName>ppt_y</p:attrName>
+                                        </p:attrNameLst>
+                                      </p:cBhvr>
+                                      <p:tavLst>
+                                        <p:tav tm="0">
+                                          <p:val>
+                                            <p:strVal val="1+#ppt_h/2"/>
+                                          </p:val>
+                                        </p:tav>
+                                        <p:tav tm="100000">
+                                          <p:val>
+                                            <p:strVal val="#ppt_y"/>
+                                          </p:val>
+                                        </p:tav>
+                                      </p:tavLst>
+                                    </p:anim>
+                                  </p:childTnLst>
+                                </p:cTn>
+                              </p:par>
+                              <p:par>
+                                <p:cTn id="45" presetID="2" presetClass="entr" presetSubtype="4" fill="hold" nodeType="withEffect">
+                                  <p:stCondLst>
+                                    <p:cond delay="0"/>
+                                  </p:stCondLst>
+                                  <p:childTnLst>
+                                    <p:set>
+                                      <p:cBhvr>
+                                        <p:cTn id="46" dur="1" fill="hold">
+                                          <p:stCondLst>
+                                            <p:cond delay="0"/>
+                                          </p:stCondLst>
+                                        </p:cTn>
+                                        <p:tgtEl>
+                                          <p:spTgt spid="4">
+                                            <p:txEl>
+                                              <p:pRg st="9" end="9"/>
+                                            </p:txEl>
+                                          </p:spTgt>
+                                        </p:tgtEl>
+                                        <p:attrNameLst>
+                                          <p:attrName>style.visibility</p:attrName>
+                                        </p:attrNameLst>
+                                      </p:cBhvr>
+                                      <p:to>
+                                        <p:strVal val="visible"/>
+                                      </p:to>
+                                    </p:set>
+                                    <p:anim calcmode="lin" valueType="num">
+                                      <p:cBhvr additive="base">
+                                        <p:cTn id="47" dur="500" fill="hold"/>
+                                        <p:tgtEl>
+                                          <p:spTgt spid="4">
+                                            <p:txEl>
+                                              <p:pRg st="9" end="9"/>
+                                            </p:txEl>
+                                          </p:spTgt>
+                                        </p:tgtEl>
+                                        <p:attrNameLst>
+                                          <p:attrName>ppt_x</p:attrName>
+                                        </p:attrNameLst>
+                                      </p:cBhvr>
+                                      <p:tavLst>
+                                        <p:tav tm="0">
+                                          <p:val>
+                                            <p:strVal val="#ppt_x"/>
+                                          </p:val>
+                                        </p:tav>
+                                        <p:tav tm="100000">
+                                          <p:val>
+                                            <p:strVal val="#ppt_x"/>
+                                          </p:val>
+                                        </p:tav>
+                                      </p:tavLst>
+                                    </p:anim>
+                                    <p:anim calcmode="lin" valueType="num">
+                                      <p:cBhvr additive="base">
+                                        <p:cTn id="48" dur="500" fill="hold"/>
+                                        <p:tgtEl>
+                                          <p:spTgt spid="4">
+                                            <p:txEl>
+                                              <p:pRg st="9" end="9"/>
+                                            </p:txEl>
+                                          </p:spTgt>
+                                        </p:tgtEl>
+                                        <p:attrNameLst>
+                                          <p:attrName>ppt_y</p:attrName>
+                                        </p:attrNameLst>
+                                      </p:cBhvr>
+                                      <p:tavLst>
+                                        <p:tav tm="0">
+                                          <p:val>
+                                            <p:strVal val="1+#ppt_h/2"/>
+                                          </p:val>
+                                        </p:tav>
+                                        <p:tav tm="100000">
+                                          <p:val>
+                                            <p:strVal val="#ppt_y"/>
+                                          </p:val>
+                                        </p:tav>
+                                      </p:tavLst>
+                                    </p:anim>
+                                  </p:childTnLst>
+                                </p:cTn>
+                              </p:par>
+                              <p:par>
+                                <p:cTn id="49" presetID="2" presetClass="entr" presetSubtype="4" fill="hold" nodeType="withEffect">
+                                  <p:stCondLst>
+                                    <p:cond delay="0"/>
+                                  </p:stCondLst>
+                                  <p:childTnLst>
+                                    <p:set>
+                                      <p:cBhvr>
+                                        <p:cTn id="50" dur="1" fill="hold">
+                                          <p:stCondLst>
+                                            <p:cond delay="0"/>
+                                          </p:stCondLst>
+                                        </p:cTn>
+                                        <p:tgtEl>
+                                          <p:spTgt spid="4">
+                                            <p:txEl>
+                                              <p:pRg st="10" end="10"/>
+                                            </p:txEl>
+                                          </p:spTgt>
+                                        </p:tgtEl>
+                                        <p:attrNameLst>
+                                          <p:attrName>style.visibility</p:attrName>
+                                        </p:attrNameLst>
+                                      </p:cBhvr>
+                                      <p:to>
+                                        <p:strVal val="visible"/>
+                                      </p:to>
+                                    </p:set>
+                                    <p:anim calcmode="lin" valueType="num">
+                                      <p:cBhvr additive="base">
+                                        <p:cTn id="51" dur="500" fill="hold"/>
+                                        <p:tgtEl>
+                                          <p:spTgt spid="4">
+                                            <p:txEl>
+                                              <p:pRg st="10" end="10"/>
+                                            </p:txEl>
+                                          </p:spTgt>
+                                        </p:tgtEl>
+                                        <p:attrNameLst>
+                                          <p:attrName>ppt_x</p:attrName>
+                                        </p:attrNameLst>
+                                      </p:cBhvr>
+                                      <p:tavLst>
+                                        <p:tav tm="0">
+                                          <p:val>
+                                            <p:strVal val="#ppt_x"/>
+                                          </p:val>
+                                        </p:tav>
+                                        <p:tav tm="100000">
+                                          <p:val>
+                                            <p:strVal val="#ppt_x"/>
+                                          </p:val>
+                                        </p:tav>
+                                      </p:tavLst>
+                                    </p:anim>
+                                    <p:anim calcmode="lin" valueType="num">
+                                      <p:cBhvr additive="base">
+                                        <p:cTn id="52" dur="500" fill="hold"/>
+                                        <p:tgtEl>
+                                          <p:spTgt spid="4">
+                                            <p:txEl>
+                                              <p:pRg st="10" end="10"/>
+                                            </p:txEl>
+                                          </p:spTgt>
+                                        </p:tgtEl>
+                                        <p:attrNameLst>
+                                          <p:attrName>ppt_y</p:attrName>
+                                        </p:attrNameLst>
+                                      </p:cBhvr>
+                                      <p:tavLst>
+                                        <p:tav tm="0">
+                                          <p:val>
+                                            <p:strVal val="1+#ppt_h/2"/>
+                                          </p:val>
+                                        </p:tav>
+                                        <p:tav tm="100000">
+                                          <p:val>
+                                            <p:strVal val="#ppt_y"/>
+                                          </p:val>
+                                        </p:tav>
+                                      </p:tavLst>
+                                    </p:anim>
+                                  </p:childTnLst>
+                                </p:cTn>
+                              </p:par>
+                            </p:childTnLst>
+                          </p:cTn>
+                        </p:par>
+                      </p:childTnLst>
+                    </p:cTn>
+                  </p:par>
+                </p:childTnLst>
+              </p:cTn>
+              <p:prevCondLst>
+                <p:cond evt="onPrev" delay="0">
+                  <p:tgtEl>
+                    <p:sldTgt/>
+                  </p:tgtEl>
+                </p:cond>
+              </p:prevCondLst>
+              <p:nextCondLst>
+                <p:cond evt="onNext" delay="0">
+                  <p:tgtEl>
+                    <p:sldTgt/>
+                  </p:tgtEl>
+                </p:cond>
+              </p:nextCondLst>
+            </p:seq>
+          </p:childTnLst>
+        </p:cTn>
+      </p:par>
+    </p:tnLst>
+  </p:timing>
 </p:sld>
 </file>
 
@@ -5943,6 +6962,20 @@
                   <a:schemeClr val="tx1"/>
                 </a:solidFill>
               </a:rPr>
+              <a:t>A hatásfok és a sötét zaj mérése feszültség függvényében</a:t>
+            </a:r>
+          </a:p>
+          <a:p>
+            <a:pPr marL="285750" indent="-285750">
+              <a:buFont typeface="Arial" panose="020B0604020202020204" pitchFamily="34" charset="0"/>
+              <a:buChar char="•"/>
+            </a:pPr>
+            <a:r>
+              <a:rPr lang="hu-HU" sz="2000" dirty="0">
+                <a:solidFill>
+                  <a:schemeClr val="tx1"/>
+                </a:solidFill>
+              </a:rPr>
               <a:t>Segít:</a:t>
             </a:r>
           </a:p>
@@ -5957,7 +6990,7 @@
                   <a:schemeClr val="tx1"/>
                 </a:solidFill>
               </a:rPr>
-              <a:t>Lehetséges mérési pontatlanságok meghatározása (sötét zaj, időzítés, holtidő, polarizáció)</a:t>
+              <a:t>Lehetséges mérési pontatlanságok meghatározása (sötét zaj, hatásfok, holtidő, polarizáció)</a:t>
             </a:r>
           </a:p>
           <a:p>
@@ -5986,34 +7019,6 @@
                 </a:solidFill>
               </a:rPr>
               <a:t>Kész modellek hatékonyságának ellenőrzése</a:t>
-            </a:r>
-          </a:p>
-          <a:p>
-            <a:pPr marL="742950" lvl="1" indent="-285750">
-              <a:buFont typeface="Arial" panose="020B0604020202020204" pitchFamily="34" charset="0"/>
-              <a:buChar char="•"/>
-            </a:pPr>
-            <a:r>
-              <a:rPr lang="hu-HU" sz="1800" dirty="0">
-                <a:solidFill>
-                  <a:schemeClr val="tx1"/>
-                </a:solidFill>
-              </a:rPr>
-              <a:t>További kvantumtechnológiák elősegítése</a:t>
-            </a:r>
-          </a:p>
-          <a:p>
-            <a:pPr marL="742950" lvl="1" indent="-285750">
-              <a:buFont typeface="Arial" panose="020B0604020202020204" pitchFamily="34" charset="0"/>
-              <a:buChar char="•"/>
-            </a:pPr>
-            <a:r>
-              <a:rPr lang="hu-HU" sz="1800" dirty="0">
-                <a:solidFill>
-                  <a:schemeClr val="tx1"/>
-                </a:solidFill>
-              </a:rPr>
-              <a:t>Költséghatékonyság-eszközkezelés</a:t>
             </a:r>
           </a:p>
         </p:txBody>
@@ -6028,6 +7033,600 @@
   <p:clrMapOvr>
     <a:masterClrMapping/>
   </p:clrMapOvr>
+  <p:timing>
+    <p:tnLst>
+      <p:par>
+        <p:cTn id="1" dur="indefinite" restart="never" nodeType="tmRoot">
+          <p:childTnLst>
+            <p:seq concurrent="1" nextAc="seek">
+              <p:cTn id="2" dur="indefinite" nodeType="mainSeq">
+                <p:childTnLst>
+                  <p:par>
+                    <p:cTn id="3" fill="hold">
+                      <p:stCondLst>
+                        <p:cond delay="indefinite"/>
+                      </p:stCondLst>
+                      <p:childTnLst>
+                        <p:par>
+                          <p:cTn id="4" fill="hold">
+                            <p:stCondLst>
+                              <p:cond delay="0"/>
+                            </p:stCondLst>
+                            <p:childTnLst>
+                              <p:par>
+                                <p:cTn id="5" presetID="2" presetClass="entr" presetSubtype="4" fill="hold" nodeType="clickEffect">
+                                  <p:stCondLst>
+                                    <p:cond delay="0"/>
+                                  </p:stCondLst>
+                                  <p:childTnLst>
+                                    <p:set>
+                                      <p:cBhvr>
+                                        <p:cTn id="6" dur="1" fill="hold">
+                                          <p:stCondLst>
+                                            <p:cond delay="0"/>
+                                          </p:stCondLst>
+                                        </p:cTn>
+                                        <p:tgtEl>
+                                          <p:spTgt spid="4">
+                                            <p:txEl>
+                                              <p:pRg st="0" end="0"/>
+                                            </p:txEl>
+                                          </p:spTgt>
+                                        </p:tgtEl>
+                                        <p:attrNameLst>
+                                          <p:attrName>style.visibility</p:attrName>
+                                        </p:attrNameLst>
+                                      </p:cBhvr>
+                                      <p:to>
+                                        <p:strVal val="visible"/>
+                                      </p:to>
+                                    </p:set>
+                                    <p:anim calcmode="lin" valueType="num">
+                                      <p:cBhvr additive="base">
+                                        <p:cTn id="7" dur="500" fill="hold"/>
+                                        <p:tgtEl>
+                                          <p:spTgt spid="4">
+                                            <p:txEl>
+                                              <p:pRg st="0" end="0"/>
+                                            </p:txEl>
+                                          </p:spTgt>
+                                        </p:tgtEl>
+                                        <p:attrNameLst>
+                                          <p:attrName>ppt_x</p:attrName>
+                                        </p:attrNameLst>
+                                      </p:cBhvr>
+                                      <p:tavLst>
+                                        <p:tav tm="0">
+                                          <p:val>
+                                            <p:strVal val="#ppt_x"/>
+                                          </p:val>
+                                        </p:tav>
+                                        <p:tav tm="100000">
+                                          <p:val>
+                                            <p:strVal val="#ppt_x"/>
+                                          </p:val>
+                                        </p:tav>
+                                      </p:tavLst>
+                                    </p:anim>
+                                    <p:anim calcmode="lin" valueType="num">
+                                      <p:cBhvr additive="base">
+                                        <p:cTn id="8" dur="500" fill="hold"/>
+                                        <p:tgtEl>
+                                          <p:spTgt spid="4">
+                                            <p:txEl>
+                                              <p:pRg st="0" end="0"/>
+                                            </p:txEl>
+                                          </p:spTgt>
+                                        </p:tgtEl>
+                                        <p:attrNameLst>
+                                          <p:attrName>ppt_y</p:attrName>
+                                        </p:attrNameLst>
+                                      </p:cBhvr>
+                                      <p:tavLst>
+                                        <p:tav tm="0">
+                                          <p:val>
+                                            <p:strVal val="1+#ppt_h/2"/>
+                                          </p:val>
+                                        </p:tav>
+                                        <p:tav tm="100000">
+                                          <p:val>
+                                            <p:strVal val="#ppt_y"/>
+                                          </p:val>
+                                        </p:tav>
+                                      </p:tavLst>
+                                    </p:anim>
+                                  </p:childTnLst>
+                                </p:cTn>
+                              </p:par>
+                            </p:childTnLst>
+                          </p:cTn>
+                        </p:par>
+                      </p:childTnLst>
+                    </p:cTn>
+                  </p:par>
+                  <p:par>
+                    <p:cTn id="9" fill="hold">
+                      <p:stCondLst>
+                        <p:cond delay="indefinite"/>
+                      </p:stCondLst>
+                      <p:childTnLst>
+                        <p:par>
+                          <p:cTn id="10" fill="hold">
+                            <p:stCondLst>
+                              <p:cond delay="0"/>
+                            </p:stCondLst>
+                            <p:childTnLst>
+                              <p:par>
+                                <p:cTn id="11" presetID="2" presetClass="entr" presetSubtype="4" fill="hold" nodeType="clickEffect">
+                                  <p:stCondLst>
+                                    <p:cond delay="0"/>
+                                  </p:stCondLst>
+                                  <p:childTnLst>
+                                    <p:set>
+                                      <p:cBhvr>
+                                        <p:cTn id="12" dur="1" fill="hold">
+                                          <p:stCondLst>
+                                            <p:cond delay="0"/>
+                                          </p:stCondLst>
+                                        </p:cTn>
+                                        <p:tgtEl>
+                                          <p:spTgt spid="4">
+                                            <p:txEl>
+                                              <p:pRg st="1" end="1"/>
+                                            </p:txEl>
+                                          </p:spTgt>
+                                        </p:tgtEl>
+                                        <p:attrNameLst>
+                                          <p:attrName>style.visibility</p:attrName>
+                                        </p:attrNameLst>
+                                      </p:cBhvr>
+                                      <p:to>
+                                        <p:strVal val="visible"/>
+                                      </p:to>
+                                    </p:set>
+                                    <p:anim calcmode="lin" valueType="num">
+                                      <p:cBhvr additive="base">
+                                        <p:cTn id="13" dur="500" fill="hold"/>
+                                        <p:tgtEl>
+                                          <p:spTgt spid="4">
+                                            <p:txEl>
+                                              <p:pRg st="1" end="1"/>
+                                            </p:txEl>
+                                          </p:spTgt>
+                                        </p:tgtEl>
+                                        <p:attrNameLst>
+                                          <p:attrName>ppt_x</p:attrName>
+                                        </p:attrNameLst>
+                                      </p:cBhvr>
+                                      <p:tavLst>
+                                        <p:tav tm="0">
+                                          <p:val>
+                                            <p:strVal val="#ppt_x"/>
+                                          </p:val>
+                                        </p:tav>
+                                        <p:tav tm="100000">
+                                          <p:val>
+                                            <p:strVal val="#ppt_x"/>
+                                          </p:val>
+                                        </p:tav>
+                                      </p:tavLst>
+                                    </p:anim>
+                                    <p:anim calcmode="lin" valueType="num">
+                                      <p:cBhvr additive="base">
+                                        <p:cTn id="14" dur="500" fill="hold"/>
+                                        <p:tgtEl>
+                                          <p:spTgt spid="4">
+                                            <p:txEl>
+                                              <p:pRg st="1" end="1"/>
+                                            </p:txEl>
+                                          </p:spTgt>
+                                        </p:tgtEl>
+                                        <p:attrNameLst>
+                                          <p:attrName>ppt_y</p:attrName>
+                                        </p:attrNameLst>
+                                      </p:cBhvr>
+                                      <p:tavLst>
+                                        <p:tav tm="0">
+                                          <p:val>
+                                            <p:strVal val="1+#ppt_h/2"/>
+                                          </p:val>
+                                        </p:tav>
+                                        <p:tav tm="100000">
+                                          <p:val>
+                                            <p:strVal val="#ppt_y"/>
+                                          </p:val>
+                                        </p:tav>
+                                      </p:tavLst>
+                                    </p:anim>
+                                  </p:childTnLst>
+                                </p:cTn>
+                              </p:par>
+                            </p:childTnLst>
+                          </p:cTn>
+                        </p:par>
+                      </p:childTnLst>
+                    </p:cTn>
+                  </p:par>
+                  <p:par>
+                    <p:cTn id="15" fill="hold">
+                      <p:stCondLst>
+                        <p:cond delay="indefinite"/>
+                      </p:stCondLst>
+                      <p:childTnLst>
+                        <p:par>
+                          <p:cTn id="16" fill="hold">
+                            <p:stCondLst>
+                              <p:cond delay="0"/>
+                            </p:stCondLst>
+                            <p:childTnLst>
+                              <p:par>
+                                <p:cTn id="17" presetID="2" presetClass="entr" presetSubtype="4" fill="hold" nodeType="clickEffect">
+                                  <p:stCondLst>
+                                    <p:cond delay="0"/>
+                                  </p:stCondLst>
+                                  <p:childTnLst>
+                                    <p:set>
+                                      <p:cBhvr>
+                                        <p:cTn id="18" dur="1" fill="hold">
+                                          <p:stCondLst>
+                                            <p:cond delay="0"/>
+                                          </p:stCondLst>
+                                        </p:cTn>
+                                        <p:tgtEl>
+                                          <p:spTgt spid="4">
+                                            <p:txEl>
+                                              <p:pRg st="2" end="2"/>
+                                            </p:txEl>
+                                          </p:spTgt>
+                                        </p:tgtEl>
+                                        <p:attrNameLst>
+                                          <p:attrName>style.visibility</p:attrName>
+                                        </p:attrNameLst>
+                                      </p:cBhvr>
+                                      <p:to>
+                                        <p:strVal val="visible"/>
+                                      </p:to>
+                                    </p:set>
+                                    <p:anim calcmode="lin" valueType="num">
+                                      <p:cBhvr additive="base">
+                                        <p:cTn id="19" dur="500" fill="hold"/>
+                                        <p:tgtEl>
+                                          <p:spTgt spid="4">
+                                            <p:txEl>
+                                              <p:pRg st="2" end="2"/>
+                                            </p:txEl>
+                                          </p:spTgt>
+                                        </p:tgtEl>
+                                        <p:attrNameLst>
+                                          <p:attrName>ppt_x</p:attrName>
+                                        </p:attrNameLst>
+                                      </p:cBhvr>
+                                      <p:tavLst>
+                                        <p:tav tm="0">
+                                          <p:val>
+                                            <p:strVal val="#ppt_x"/>
+                                          </p:val>
+                                        </p:tav>
+                                        <p:tav tm="100000">
+                                          <p:val>
+                                            <p:strVal val="#ppt_x"/>
+                                          </p:val>
+                                        </p:tav>
+                                      </p:tavLst>
+                                    </p:anim>
+                                    <p:anim calcmode="lin" valueType="num">
+                                      <p:cBhvr additive="base">
+                                        <p:cTn id="20" dur="500" fill="hold"/>
+                                        <p:tgtEl>
+                                          <p:spTgt spid="4">
+                                            <p:txEl>
+                                              <p:pRg st="2" end="2"/>
+                                            </p:txEl>
+                                          </p:spTgt>
+                                        </p:tgtEl>
+                                        <p:attrNameLst>
+                                          <p:attrName>ppt_y</p:attrName>
+                                        </p:attrNameLst>
+                                      </p:cBhvr>
+                                      <p:tavLst>
+                                        <p:tav tm="0">
+                                          <p:val>
+                                            <p:strVal val="1+#ppt_h/2"/>
+                                          </p:val>
+                                        </p:tav>
+                                        <p:tav tm="100000">
+                                          <p:val>
+                                            <p:strVal val="#ppt_y"/>
+                                          </p:val>
+                                        </p:tav>
+                                      </p:tavLst>
+                                    </p:anim>
+                                  </p:childTnLst>
+                                </p:cTn>
+                              </p:par>
+                              <p:par>
+                                <p:cTn id="21" presetID="2" presetClass="entr" presetSubtype="4" fill="hold" nodeType="withEffect">
+                                  <p:stCondLst>
+                                    <p:cond delay="0"/>
+                                  </p:stCondLst>
+                                  <p:childTnLst>
+                                    <p:set>
+                                      <p:cBhvr>
+                                        <p:cTn id="22" dur="1" fill="hold">
+                                          <p:stCondLst>
+                                            <p:cond delay="0"/>
+                                          </p:stCondLst>
+                                        </p:cTn>
+                                        <p:tgtEl>
+                                          <p:spTgt spid="4">
+                                            <p:txEl>
+                                              <p:pRg st="3" end="3"/>
+                                            </p:txEl>
+                                          </p:spTgt>
+                                        </p:tgtEl>
+                                        <p:attrNameLst>
+                                          <p:attrName>style.visibility</p:attrName>
+                                        </p:attrNameLst>
+                                      </p:cBhvr>
+                                      <p:to>
+                                        <p:strVal val="visible"/>
+                                      </p:to>
+                                    </p:set>
+                                    <p:anim calcmode="lin" valueType="num">
+                                      <p:cBhvr additive="base">
+                                        <p:cTn id="23" dur="500" fill="hold"/>
+                                        <p:tgtEl>
+                                          <p:spTgt spid="4">
+                                            <p:txEl>
+                                              <p:pRg st="3" end="3"/>
+                                            </p:txEl>
+                                          </p:spTgt>
+                                        </p:tgtEl>
+                                        <p:attrNameLst>
+                                          <p:attrName>ppt_x</p:attrName>
+                                        </p:attrNameLst>
+                                      </p:cBhvr>
+                                      <p:tavLst>
+                                        <p:tav tm="0">
+                                          <p:val>
+                                            <p:strVal val="#ppt_x"/>
+                                          </p:val>
+                                        </p:tav>
+                                        <p:tav tm="100000">
+                                          <p:val>
+                                            <p:strVal val="#ppt_x"/>
+                                          </p:val>
+                                        </p:tav>
+                                      </p:tavLst>
+                                    </p:anim>
+                                    <p:anim calcmode="lin" valueType="num">
+                                      <p:cBhvr additive="base">
+                                        <p:cTn id="24" dur="500" fill="hold"/>
+                                        <p:tgtEl>
+                                          <p:spTgt spid="4">
+                                            <p:txEl>
+                                              <p:pRg st="3" end="3"/>
+                                            </p:txEl>
+                                          </p:spTgt>
+                                        </p:tgtEl>
+                                        <p:attrNameLst>
+                                          <p:attrName>ppt_y</p:attrName>
+                                        </p:attrNameLst>
+                                      </p:cBhvr>
+                                      <p:tavLst>
+                                        <p:tav tm="0">
+                                          <p:val>
+                                            <p:strVal val="1+#ppt_h/2"/>
+                                          </p:val>
+                                        </p:tav>
+                                        <p:tav tm="100000">
+                                          <p:val>
+                                            <p:strVal val="#ppt_y"/>
+                                          </p:val>
+                                        </p:tav>
+                                      </p:tavLst>
+                                    </p:anim>
+                                  </p:childTnLst>
+                                </p:cTn>
+                              </p:par>
+                              <p:par>
+                                <p:cTn id="25" presetID="2" presetClass="entr" presetSubtype="4" fill="hold" nodeType="withEffect">
+                                  <p:stCondLst>
+                                    <p:cond delay="0"/>
+                                  </p:stCondLst>
+                                  <p:childTnLst>
+                                    <p:set>
+                                      <p:cBhvr>
+                                        <p:cTn id="26" dur="1" fill="hold">
+                                          <p:stCondLst>
+                                            <p:cond delay="0"/>
+                                          </p:stCondLst>
+                                        </p:cTn>
+                                        <p:tgtEl>
+                                          <p:spTgt spid="4">
+                                            <p:txEl>
+                                              <p:pRg st="4" end="4"/>
+                                            </p:txEl>
+                                          </p:spTgt>
+                                        </p:tgtEl>
+                                        <p:attrNameLst>
+                                          <p:attrName>style.visibility</p:attrName>
+                                        </p:attrNameLst>
+                                      </p:cBhvr>
+                                      <p:to>
+                                        <p:strVal val="visible"/>
+                                      </p:to>
+                                    </p:set>
+                                    <p:anim calcmode="lin" valueType="num">
+                                      <p:cBhvr additive="base">
+                                        <p:cTn id="27" dur="500" fill="hold"/>
+                                        <p:tgtEl>
+                                          <p:spTgt spid="4">
+                                            <p:txEl>
+                                              <p:pRg st="4" end="4"/>
+                                            </p:txEl>
+                                          </p:spTgt>
+                                        </p:tgtEl>
+                                        <p:attrNameLst>
+                                          <p:attrName>ppt_x</p:attrName>
+                                        </p:attrNameLst>
+                                      </p:cBhvr>
+                                      <p:tavLst>
+                                        <p:tav tm="0">
+                                          <p:val>
+                                            <p:strVal val="#ppt_x"/>
+                                          </p:val>
+                                        </p:tav>
+                                        <p:tav tm="100000">
+                                          <p:val>
+                                            <p:strVal val="#ppt_x"/>
+                                          </p:val>
+                                        </p:tav>
+                                      </p:tavLst>
+                                    </p:anim>
+                                    <p:anim calcmode="lin" valueType="num">
+                                      <p:cBhvr additive="base">
+                                        <p:cTn id="28" dur="500" fill="hold"/>
+                                        <p:tgtEl>
+                                          <p:spTgt spid="4">
+                                            <p:txEl>
+                                              <p:pRg st="4" end="4"/>
+                                            </p:txEl>
+                                          </p:spTgt>
+                                        </p:tgtEl>
+                                        <p:attrNameLst>
+                                          <p:attrName>ppt_y</p:attrName>
+                                        </p:attrNameLst>
+                                      </p:cBhvr>
+                                      <p:tavLst>
+                                        <p:tav tm="0">
+                                          <p:val>
+                                            <p:strVal val="1+#ppt_h/2"/>
+                                          </p:val>
+                                        </p:tav>
+                                        <p:tav tm="100000">
+                                          <p:val>
+                                            <p:strVal val="#ppt_y"/>
+                                          </p:val>
+                                        </p:tav>
+                                      </p:tavLst>
+                                    </p:anim>
+                                  </p:childTnLst>
+                                </p:cTn>
+                              </p:par>
+                              <p:par>
+                                <p:cTn id="29" presetID="2" presetClass="entr" presetSubtype="4" fill="hold" nodeType="withEffect">
+                                  <p:stCondLst>
+                                    <p:cond delay="0"/>
+                                  </p:stCondLst>
+                                  <p:childTnLst>
+                                    <p:set>
+                                      <p:cBhvr>
+                                        <p:cTn id="30" dur="1" fill="hold">
+                                          <p:stCondLst>
+                                            <p:cond delay="0"/>
+                                          </p:stCondLst>
+                                        </p:cTn>
+                                        <p:tgtEl>
+                                          <p:spTgt spid="4">
+                                            <p:txEl>
+                                              <p:pRg st="5" end="5"/>
+                                            </p:txEl>
+                                          </p:spTgt>
+                                        </p:tgtEl>
+                                        <p:attrNameLst>
+                                          <p:attrName>style.visibility</p:attrName>
+                                        </p:attrNameLst>
+                                      </p:cBhvr>
+                                      <p:to>
+                                        <p:strVal val="visible"/>
+                                      </p:to>
+                                    </p:set>
+                                    <p:anim calcmode="lin" valueType="num">
+                                      <p:cBhvr additive="base">
+                                        <p:cTn id="31" dur="500" fill="hold"/>
+                                        <p:tgtEl>
+                                          <p:spTgt spid="4">
+                                            <p:txEl>
+                                              <p:pRg st="5" end="5"/>
+                                            </p:txEl>
+                                          </p:spTgt>
+                                        </p:tgtEl>
+                                        <p:attrNameLst>
+                                          <p:attrName>ppt_x</p:attrName>
+                                        </p:attrNameLst>
+                                      </p:cBhvr>
+                                      <p:tavLst>
+                                        <p:tav tm="0">
+                                          <p:val>
+                                            <p:strVal val="#ppt_x"/>
+                                          </p:val>
+                                        </p:tav>
+                                        <p:tav tm="100000">
+                                          <p:val>
+                                            <p:strVal val="#ppt_x"/>
+                                          </p:val>
+                                        </p:tav>
+                                      </p:tavLst>
+                                    </p:anim>
+                                    <p:anim calcmode="lin" valueType="num">
+                                      <p:cBhvr additive="base">
+                                        <p:cTn id="32" dur="500" fill="hold"/>
+                                        <p:tgtEl>
+                                          <p:spTgt spid="4">
+                                            <p:txEl>
+                                              <p:pRg st="5" end="5"/>
+                                            </p:txEl>
+                                          </p:spTgt>
+                                        </p:tgtEl>
+                                        <p:attrNameLst>
+                                          <p:attrName>ppt_y</p:attrName>
+                                        </p:attrNameLst>
+                                      </p:cBhvr>
+                                      <p:tavLst>
+                                        <p:tav tm="0">
+                                          <p:val>
+                                            <p:strVal val="1+#ppt_h/2"/>
+                                          </p:val>
+                                        </p:tav>
+                                        <p:tav tm="100000">
+                                          <p:val>
+                                            <p:strVal val="#ppt_y"/>
+                                          </p:val>
+                                        </p:tav>
+                                      </p:tavLst>
+                                    </p:anim>
+                                  </p:childTnLst>
+                                </p:cTn>
+                              </p:par>
+                            </p:childTnLst>
+                          </p:cTn>
+                        </p:par>
+                      </p:childTnLst>
+                    </p:cTn>
+                  </p:par>
+                </p:childTnLst>
+              </p:cTn>
+              <p:prevCondLst>
+                <p:cond evt="onPrev" delay="0">
+                  <p:tgtEl>
+                    <p:sldTgt/>
+                  </p:tgtEl>
+                </p:cond>
+              </p:prevCondLst>
+              <p:nextCondLst>
+                <p:cond evt="onNext" delay="0">
+                  <p:tgtEl>
+                    <p:sldTgt/>
+                  </p:tgtEl>
+                </p:cond>
+              </p:nextCondLst>
+            </p:seq>
+          </p:childTnLst>
+        </p:cTn>
+      </p:par>
+    </p:tnLst>
+  </p:timing>
 </p:sld>
 </file>
 
@@ -6082,7 +7681,7 @@
           <a:p>
             <a:r>
               <a:rPr lang="hu-HU" dirty="0"/>
-              <a:t>Milyen terv alapján dolgoztam?</a:t>
+              <a:t>Az 1 évre szóló munka terv</a:t>
             </a:r>
           </a:p>
         </p:txBody>
@@ -6424,10 +8023,1971 @@
   <p:clrMapOvr>
     <a:masterClrMapping/>
   </p:clrMapOvr>
+  <p:timing>
+    <p:tnLst>
+      <p:par>
+        <p:cTn id="1" dur="indefinite" restart="never" nodeType="tmRoot">
+          <p:childTnLst>
+            <p:seq concurrent="1" nextAc="seek">
+              <p:cTn id="2" dur="indefinite" nodeType="mainSeq">
+                <p:childTnLst>
+                  <p:par>
+                    <p:cTn id="3" fill="hold">
+                      <p:stCondLst>
+                        <p:cond delay="indefinite"/>
+                      </p:stCondLst>
+                      <p:childTnLst>
+                        <p:par>
+                          <p:cTn id="4" fill="hold">
+                            <p:stCondLst>
+                              <p:cond delay="0"/>
+                            </p:stCondLst>
+                            <p:childTnLst>
+                              <p:par>
+                                <p:cTn id="5" presetID="2" presetClass="entr" presetSubtype="4" fill="hold" nodeType="clickEffect">
+                                  <p:stCondLst>
+                                    <p:cond delay="0"/>
+                                  </p:stCondLst>
+                                  <p:childTnLst>
+                                    <p:set>
+                                      <p:cBhvr>
+                                        <p:cTn id="6" dur="1" fill="hold">
+                                          <p:stCondLst>
+                                            <p:cond delay="0"/>
+                                          </p:stCondLst>
+                                        </p:cTn>
+                                        <p:tgtEl>
+                                          <p:spTgt spid="4">
+                                            <p:txEl>
+                                              <p:pRg st="0" end="0"/>
+                                            </p:txEl>
+                                          </p:spTgt>
+                                        </p:tgtEl>
+                                        <p:attrNameLst>
+                                          <p:attrName>style.visibility</p:attrName>
+                                        </p:attrNameLst>
+                                      </p:cBhvr>
+                                      <p:to>
+                                        <p:strVal val="visible"/>
+                                      </p:to>
+                                    </p:set>
+                                    <p:anim calcmode="lin" valueType="num">
+                                      <p:cBhvr additive="base">
+                                        <p:cTn id="7" dur="500" fill="hold"/>
+                                        <p:tgtEl>
+                                          <p:spTgt spid="4">
+                                            <p:txEl>
+                                              <p:pRg st="0" end="0"/>
+                                            </p:txEl>
+                                          </p:spTgt>
+                                        </p:tgtEl>
+                                        <p:attrNameLst>
+                                          <p:attrName>ppt_x</p:attrName>
+                                        </p:attrNameLst>
+                                      </p:cBhvr>
+                                      <p:tavLst>
+                                        <p:tav tm="0">
+                                          <p:val>
+                                            <p:strVal val="#ppt_x"/>
+                                          </p:val>
+                                        </p:tav>
+                                        <p:tav tm="100000">
+                                          <p:val>
+                                            <p:strVal val="#ppt_x"/>
+                                          </p:val>
+                                        </p:tav>
+                                      </p:tavLst>
+                                    </p:anim>
+                                    <p:anim calcmode="lin" valueType="num">
+                                      <p:cBhvr additive="base">
+                                        <p:cTn id="8" dur="500" fill="hold"/>
+                                        <p:tgtEl>
+                                          <p:spTgt spid="4">
+                                            <p:txEl>
+                                              <p:pRg st="0" end="0"/>
+                                            </p:txEl>
+                                          </p:spTgt>
+                                        </p:tgtEl>
+                                        <p:attrNameLst>
+                                          <p:attrName>ppt_y</p:attrName>
+                                        </p:attrNameLst>
+                                      </p:cBhvr>
+                                      <p:tavLst>
+                                        <p:tav tm="0">
+                                          <p:val>
+                                            <p:strVal val="1+#ppt_h/2"/>
+                                          </p:val>
+                                        </p:tav>
+                                        <p:tav tm="100000">
+                                          <p:val>
+                                            <p:strVal val="#ppt_y"/>
+                                          </p:val>
+                                        </p:tav>
+                                      </p:tavLst>
+                                    </p:anim>
+                                  </p:childTnLst>
+                                </p:cTn>
+                              </p:par>
+                            </p:childTnLst>
+                          </p:cTn>
+                        </p:par>
+                      </p:childTnLst>
+                    </p:cTn>
+                  </p:par>
+                  <p:par>
+                    <p:cTn id="9" fill="hold">
+                      <p:stCondLst>
+                        <p:cond delay="indefinite"/>
+                      </p:stCondLst>
+                      <p:childTnLst>
+                        <p:par>
+                          <p:cTn id="10" fill="hold">
+                            <p:stCondLst>
+                              <p:cond delay="0"/>
+                            </p:stCondLst>
+                            <p:childTnLst>
+                              <p:par>
+                                <p:cTn id="11" presetID="2" presetClass="entr" presetSubtype="4" fill="hold" nodeType="clickEffect">
+                                  <p:stCondLst>
+                                    <p:cond delay="0"/>
+                                  </p:stCondLst>
+                                  <p:childTnLst>
+                                    <p:set>
+                                      <p:cBhvr>
+                                        <p:cTn id="12" dur="1" fill="hold">
+                                          <p:stCondLst>
+                                            <p:cond delay="0"/>
+                                          </p:stCondLst>
+                                        </p:cTn>
+                                        <p:tgtEl>
+                                          <p:spTgt spid="4">
+                                            <p:txEl>
+                                              <p:pRg st="1" end="1"/>
+                                            </p:txEl>
+                                          </p:spTgt>
+                                        </p:tgtEl>
+                                        <p:attrNameLst>
+                                          <p:attrName>style.visibility</p:attrName>
+                                        </p:attrNameLst>
+                                      </p:cBhvr>
+                                      <p:to>
+                                        <p:strVal val="visible"/>
+                                      </p:to>
+                                    </p:set>
+                                    <p:anim calcmode="lin" valueType="num">
+                                      <p:cBhvr additive="base">
+                                        <p:cTn id="13" dur="500" fill="hold"/>
+                                        <p:tgtEl>
+                                          <p:spTgt spid="4">
+                                            <p:txEl>
+                                              <p:pRg st="1" end="1"/>
+                                            </p:txEl>
+                                          </p:spTgt>
+                                        </p:tgtEl>
+                                        <p:attrNameLst>
+                                          <p:attrName>ppt_x</p:attrName>
+                                        </p:attrNameLst>
+                                      </p:cBhvr>
+                                      <p:tavLst>
+                                        <p:tav tm="0">
+                                          <p:val>
+                                            <p:strVal val="#ppt_x"/>
+                                          </p:val>
+                                        </p:tav>
+                                        <p:tav tm="100000">
+                                          <p:val>
+                                            <p:strVal val="#ppt_x"/>
+                                          </p:val>
+                                        </p:tav>
+                                      </p:tavLst>
+                                    </p:anim>
+                                    <p:anim calcmode="lin" valueType="num">
+                                      <p:cBhvr additive="base">
+                                        <p:cTn id="14" dur="500" fill="hold"/>
+                                        <p:tgtEl>
+                                          <p:spTgt spid="4">
+                                            <p:txEl>
+                                              <p:pRg st="1" end="1"/>
+                                            </p:txEl>
+                                          </p:spTgt>
+                                        </p:tgtEl>
+                                        <p:attrNameLst>
+                                          <p:attrName>ppt_y</p:attrName>
+                                        </p:attrNameLst>
+                                      </p:cBhvr>
+                                      <p:tavLst>
+                                        <p:tav tm="0">
+                                          <p:val>
+                                            <p:strVal val="1+#ppt_h/2"/>
+                                          </p:val>
+                                        </p:tav>
+                                        <p:tav tm="100000">
+                                          <p:val>
+                                            <p:strVal val="#ppt_y"/>
+                                          </p:val>
+                                        </p:tav>
+                                      </p:tavLst>
+                                    </p:anim>
+                                  </p:childTnLst>
+                                </p:cTn>
+                              </p:par>
+                            </p:childTnLst>
+                          </p:cTn>
+                        </p:par>
+                      </p:childTnLst>
+                    </p:cTn>
+                  </p:par>
+                  <p:par>
+                    <p:cTn id="15" fill="hold">
+                      <p:stCondLst>
+                        <p:cond delay="indefinite"/>
+                      </p:stCondLst>
+                      <p:childTnLst>
+                        <p:par>
+                          <p:cTn id="16" fill="hold">
+                            <p:stCondLst>
+                              <p:cond delay="0"/>
+                            </p:stCondLst>
+                            <p:childTnLst>
+                              <p:par>
+                                <p:cTn id="17" presetID="2" presetClass="entr" presetSubtype="4" fill="hold" nodeType="clickEffect">
+                                  <p:stCondLst>
+                                    <p:cond delay="0"/>
+                                  </p:stCondLst>
+                                  <p:childTnLst>
+                                    <p:set>
+                                      <p:cBhvr>
+                                        <p:cTn id="18" dur="1" fill="hold">
+                                          <p:stCondLst>
+                                            <p:cond delay="0"/>
+                                          </p:stCondLst>
+                                        </p:cTn>
+                                        <p:tgtEl>
+                                          <p:spTgt spid="4">
+                                            <p:txEl>
+                                              <p:pRg st="2" end="2"/>
+                                            </p:txEl>
+                                          </p:spTgt>
+                                        </p:tgtEl>
+                                        <p:attrNameLst>
+                                          <p:attrName>style.visibility</p:attrName>
+                                        </p:attrNameLst>
+                                      </p:cBhvr>
+                                      <p:to>
+                                        <p:strVal val="visible"/>
+                                      </p:to>
+                                    </p:set>
+                                    <p:anim calcmode="lin" valueType="num">
+                                      <p:cBhvr additive="base">
+                                        <p:cTn id="19" dur="500" fill="hold"/>
+                                        <p:tgtEl>
+                                          <p:spTgt spid="4">
+                                            <p:txEl>
+                                              <p:pRg st="2" end="2"/>
+                                            </p:txEl>
+                                          </p:spTgt>
+                                        </p:tgtEl>
+                                        <p:attrNameLst>
+                                          <p:attrName>ppt_x</p:attrName>
+                                        </p:attrNameLst>
+                                      </p:cBhvr>
+                                      <p:tavLst>
+                                        <p:tav tm="0">
+                                          <p:val>
+                                            <p:strVal val="#ppt_x"/>
+                                          </p:val>
+                                        </p:tav>
+                                        <p:tav tm="100000">
+                                          <p:val>
+                                            <p:strVal val="#ppt_x"/>
+                                          </p:val>
+                                        </p:tav>
+                                      </p:tavLst>
+                                    </p:anim>
+                                    <p:anim calcmode="lin" valueType="num">
+                                      <p:cBhvr additive="base">
+                                        <p:cTn id="20" dur="500" fill="hold"/>
+                                        <p:tgtEl>
+                                          <p:spTgt spid="4">
+                                            <p:txEl>
+                                              <p:pRg st="2" end="2"/>
+                                            </p:txEl>
+                                          </p:spTgt>
+                                        </p:tgtEl>
+                                        <p:attrNameLst>
+                                          <p:attrName>ppt_y</p:attrName>
+                                        </p:attrNameLst>
+                                      </p:cBhvr>
+                                      <p:tavLst>
+                                        <p:tav tm="0">
+                                          <p:val>
+                                            <p:strVal val="1+#ppt_h/2"/>
+                                          </p:val>
+                                        </p:tav>
+                                        <p:tav tm="100000">
+                                          <p:val>
+                                            <p:strVal val="#ppt_y"/>
+                                          </p:val>
+                                        </p:tav>
+                                      </p:tavLst>
+                                    </p:anim>
+                                  </p:childTnLst>
+                                </p:cTn>
+                              </p:par>
+                            </p:childTnLst>
+                          </p:cTn>
+                        </p:par>
+                      </p:childTnLst>
+                    </p:cTn>
+                  </p:par>
+                  <p:par>
+                    <p:cTn id="21" fill="hold">
+                      <p:stCondLst>
+                        <p:cond delay="indefinite"/>
+                      </p:stCondLst>
+                      <p:childTnLst>
+                        <p:par>
+                          <p:cTn id="22" fill="hold">
+                            <p:stCondLst>
+                              <p:cond delay="0"/>
+                            </p:stCondLst>
+                            <p:childTnLst>
+                              <p:par>
+                                <p:cTn id="23" presetID="2" presetClass="entr" presetSubtype="4" fill="hold" nodeType="clickEffect">
+                                  <p:stCondLst>
+                                    <p:cond delay="0"/>
+                                  </p:stCondLst>
+                                  <p:childTnLst>
+                                    <p:set>
+                                      <p:cBhvr>
+                                        <p:cTn id="24" dur="1" fill="hold">
+                                          <p:stCondLst>
+                                            <p:cond delay="0"/>
+                                          </p:stCondLst>
+                                        </p:cTn>
+                                        <p:tgtEl>
+                                          <p:spTgt spid="6"/>
+                                        </p:tgtEl>
+                                        <p:attrNameLst>
+                                          <p:attrName>style.visibility</p:attrName>
+                                        </p:attrNameLst>
+                                      </p:cBhvr>
+                                      <p:to>
+                                        <p:strVal val="visible"/>
+                                      </p:to>
+                                    </p:set>
+                                    <p:anim calcmode="lin" valueType="num">
+                                      <p:cBhvr additive="base">
+                                        <p:cTn id="25" dur="500" fill="hold"/>
+                                        <p:tgtEl>
+                                          <p:spTgt spid="6"/>
+                                        </p:tgtEl>
+                                        <p:attrNameLst>
+                                          <p:attrName>ppt_x</p:attrName>
+                                        </p:attrNameLst>
+                                      </p:cBhvr>
+                                      <p:tavLst>
+                                        <p:tav tm="0">
+                                          <p:val>
+                                            <p:strVal val="#ppt_x"/>
+                                          </p:val>
+                                        </p:tav>
+                                        <p:tav tm="100000">
+                                          <p:val>
+                                            <p:strVal val="#ppt_x"/>
+                                          </p:val>
+                                        </p:tav>
+                                      </p:tavLst>
+                                    </p:anim>
+                                    <p:anim calcmode="lin" valueType="num">
+                                      <p:cBhvr additive="base">
+                                        <p:cTn id="26" dur="500" fill="hold"/>
+                                        <p:tgtEl>
+                                          <p:spTgt spid="6"/>
+                                        </p:tgtEl>
+                                        <p:attrNameLst>
+                                          <p:attrName>ppt_y</p:attrName>
+                                        </p:attrNameLst>
+                                      </p:cBhvr>
+                                      <p:tavLst>
+                                        <p:tav tm="0">
+                                          <p:val>
+                                            <p:strVal val="1+#ppt_h/2"/>
+                                          </p:val>
+                                        </p:tav>
+                                        <p:tav tm="100000">
+                                          <p:val>
+                                            <p:strVal val="#ppt_y"/>
+                                          </p:val>
+                                        </p:tav>
+                                      </p:tavLst>
+                                    </p:anim>
+                                  </p:childTnLst>
+                                </p:cTn>
+                              </p:par>
+                            </p:childTnLst>
+                          </p:cTn>
+                        </p:par>
+                      </p:childTnLst>
+                    </p:cTn>
+                  </p:par>
+                  <p:par>
+                    <p:cTn id="27" fill="hold">
+                      <p:stCondLst>
+                        <p:cond delay="indefinite"/>
+                      </p:stCondLst>
+                      <p:childTnLst>
+                        <p:par>
+                          <p:cTn id="28" fill="hold">
+                            <p:stCondLst>
+                              <p:cond delay="0"/>
+                            </p:stCondLst>
+                            <p:childTnLst>
+                              <p:par>
+                                <p:cTn id="29" presetID="2" presetClass="entr" presetSubtype="4" fill="hold" nodeType="clickEffect">
+                                  <p:stCondLst>
+                                    <p:cond delay="0"/>
+                                  </p:stCondLst>
+                                  <p:childTnLst>
+                                    <p:set>
+                                      <p:cBhvr>
+                                        <p:cTn id="30" dur="1" fill="hold">
+                                          <p:stCondLst>
+                                            <p:cond delay="0"/>
+                                          </p:stCondLst>
+                                        </p:cTn>
+                                        <p:tgtEl>
+                                          <p:spTgt spid="4">
+                                            <p:txEl>
+                                              <p:pRg st="3" end="3"/>
+                                            </p:txEl>
+                                          </p:spTgt>
+                                        </p:tgtEl>
+                                        <p:attrNameLst>
+                                          <p:attrName>style.visibility</p:attrName>
+                                        </p:attrNameLst>
+                                      </p:cBhvr>
+                                      <p:to>
+                                        <p:strVal val="visible"/>
+                                      </p:to>
+                                    </p:set>
+                                    <p:anim calcmode="lin" valueType="num">
+                                      <p:cBhvr additive="base">
+                                        <p:cTn id="31" dur="500" fill="hold"/>
+                                        <p:tgtEl>
+                                          <p:spTgt spid="4">
+                                            <p:txEl>
+                                              <p:pRg st="3" end="3"/>
+                                            </p:txEl>
+                                          </p:spTgt>
+                                        </p:tgtEl>
+                                        <p:attrNameLst>
+                                          <p:attrName>ppt_x</p:attrName>
+                                        </p:attrNameLst>
+                                      </p:cBhvr>
+                                      <p:tavLst>
+                                        <p:tav tm="0">
+                                          <p:val>
+                                            <p:strVal val="#ppt_x"/>
+                                          </p:val>
+                                        </p:tav>
+                                        <p:tav tm="100000">
+                                          <p:val>
+                                            <p:strVal val="#ppt_x"/>
+                                          </p:val>
+                                        </p:tav>
+                                      </p:tavLst>
+                                    </p:anim>
+                                    <p:anim calcmode="lin" valueType="num">
+                                      <p:cBhvr additive="base">
+                                        <p:cTn id="32" dur="500" fill="hold"/>
+                                        <p:tgtEl>
+                                          <p:spTgt spid="4">
+                                            <p:txEl>
+                                              <p:pRg st="3" end="3"/>
+                                            </p:txEl>
+                                          </p:spTgt>
+                                        </p:tgtEl>
+                                        <p:attrNameLst>
+                                          <p:attrName>ppt_y</p:attrName>
+                                        </p:attrNameLst>
+                                      </p:cBhvr>
+                                      <p:tavLst>
+                                        <p:tav tm="0">
+                                          <p:val>
+                                            <p:strVal val="1+#ppt_h/2"/>
+                                          </p:val>
+                                        </p:tav>
+                                        <p:tav tm="100000">
+                                          <p:val>
+                                            <p:strVal val="#ppt_y"/>
+                                          </p:val>
+                                        </p:tav>
+                                      </p:tavLst>
+                                    </p:anim>
+                                  </p:childTnLst>
+                                </p:cTn>
+                              </p:par>
+                            </p:childTnLst>
+                          </p:cTn>
+                        </p:par>
+                      </p:childTnLst>
+                    </p:cTn>
+                  </p:par>
+                  <p:par>
+                    <p:cTn id="33" fill="hold">
+                      <p:stCondLst>
+                        <p:cond delay="indefinite"/>
+                      </p:stCondLst>
+                      <p:childTnLst>
+                        <p:par>
+                          <p:cTn id="34" fill="hold">
+                            <p:stCondLst>
+                              <p:cond delay="0"/>
+                            </p:stCondLst>
+                            <p:childTnLst>
+                              <p:par>
+                                <p:cTn id="35" presetID="2" presetClass="entr" presetSubtype="4" fill="hold" nodeType="clickEffect">
+                                  <p:stCondLst>
+                                    <p:cond delay="0"/>
+                                  </p:stCondLst>
+                                  <p:childTnLst>
+                                    <p:set>
+                                      <p:cBhvr>
+                                        <p:cTn id="36" dur="1" fill="hold">
+                                          <p:stCondLst>
+                                            <p:cond delay="0"/>
+                                          </p:stCondLst>
+                                        </p:cTn>
+                                        <p:tgtEl>
+                                          <p:spTgt spid="4">
+                                            <p:txEl>
+                                              <p:pRg st="4" end="4"/>
+                                            </p:txEl>
+                                          </p:spTgt>
+                                        </p:tgtEl>
+                                        <p:attrNameLst>
+                                          <p:attrName>style.visibility</p:attrName>
+                                        </p:attrNameLst>
+                                      </p:cBhvr>
+                                      <p:to>
+                                        <p:strVal val="visible"/>
+                                      </p:to>
+                                    </p:set>
+                                    <p:anim calcmode="lin" valueType="num">
+                                      <p:cBhvr additive="base">
+                                        <p:cTn id="37" dur="500" fill="hold"/>
+                                        <p:tgtEl>
+                                          <p:spTgt spid="4">
+                                            <p:txEl>
+                                              <p:pRg st="4" end="4"/>
+                                            </p:txEl>
+                                          </p:spTgt>
+                                        </p:tgtEl>
+                                        <p:attrNameLst>
+                                          <p:attrName>ppt_x</p:attrName>
+                                        </p:attrNameLst>
+                                      </p:cBhvr>
+                                      <p:tavLst>
+                                        <p:tav tm="0">
+                                          <p:val>
+                                            <p:strVal val="#ppt_x"/>
+                                          </p:val>
+                                        </p:tav>
+                                        <p:tav tm="100000">
+                                          <p:val>
+                                            <p:strVal val="#ppt_x"/>
+                                          </p:val>
+                                        </p:tav>
+                                      </p:tavLst>
+                                    </p:anim>
+                                    <p:anim calcmode="lin" valueType="num">
+                                      <p:cBhvr additive="base">
+                                        <p:cTn id="38" dur="500" fill="hold"/>
+                                        <p:tgtEl>
+                                          <p:spTgt spid="4">
+                                            <p:txEl>
+                                              <p:pRg st="4" end="4"/>
+                                            </p:txEl>
+                                          </p:spTgt>
+                                        </p:tgtEl>
+                                        <p:attrNameLst>
+                                          <p:attrName>ppt_y</p:attrName>
+                                        </p:attrNameLst>
+                                      </p:cBhvr>
+                                      <p:tavLst>
+                                        <p:tav tm="0">
+                                          <p:val>
+                                            <p:strVal val="1+#ppt_h/2"/>
+                                          </p:val>
+                                        </p:tav>
+                                        <p:tav tm="100000">
+                                          <p:val>
+                                            <p:strVal val="#ppt_y"/>
+                                          </p:val>
+                                        </p:tav>
+                                      </p:tavLst>
+                                    </p:anim>
+                                  </p:childTnLst>
+                                </p:cTn>
+                              </p:par>
+                            </p:childTnLst>
+                          </p:cTn>
+                        </p:par>
+                      </p:childTnLst>
+                    </p:cTn>
+                  </p:par>
+                  <p:par>
+                    <p:cTn id="39" fill="hold">
+                      <p:stCondLst>
+                        <p:cond delay="indefinite"/>
+                      </p:stCondLst>
+                      <p:childTnLst>
+                        <p:par>
+                          <p:cTn id="40" fill="hold">
+                            <p:stCondLst>
+                              <p:cond delay="0"/>
+                            </p:stCondLst>
+                            <p:childTnLst>
+                              <p:par>
+                                <p:cTn id="41" presetID="2" presetClass="entr" presetSubtype="4" fill="hold" nodeType="clickEffect">
+                                  <p:stCondLst>
+                                    <p:cond delay="0"/>
+                                  </p:stCondLst>
+                                  <p:childTnLst>
+                                    <p:set>
+                                      <p:cBhvr>
+                                        <p:cTn id="42" dur="1" fill="hold">
+                                          <p:stCondLst>
+                                            <p:cond delay="0"/>
+                                          </p:stCondLst>
+                                        </p:cTn>
+                                        <p:tgtEl>
+                                          <p:spTgt spid="4">
+                                            <p:txEl>
+                                              <p:pRg st="5" end="5"/>
+                                            </p:txEl>
+                                          </p:spTgt>
+                                        </p:tgtEl>
+                                        <p:attrNameLst>
+                                          <p:attrName>style.visibility</p:attrName>
+                                        </p:attrNameLst>
+                                      </p:cBhvr>
+                                      <p:to>
+                                        <p:strVal val="visible"/>
+                                      </p:to>
+                                    </p:set>
+                                    <p:anim calcmode="lin" valueType="num">
+                                      <p:cBhvr additive="base">
+                                        <p:cTn id="43" dur="500" fill="hold"/>
+                                        <p:tgtEl>
+                                          <p:spTgt spid="4">
+                                            <p:txEl>
+                                              <p:pRg st="5" end="5"/>
+                                            </p:txEl>
+                                          </p:spTgt>
+                                        </p:tgtEl>
+                                        <p:attrNameLst>
+                                          <p:attrName>ppt_x</p:attrName>
+                                        </p:attrNameLst>
+                                      </p:cBhvr>
+                                      <p:tavLst>
+                                        <p:tav tm="0">
+                                          <p:val>
+                                            <p:strVal val="#ppt_x"/>
+                                          </p:val>
+                                        </p:tav>
+                                        <p:tav tm="100000">
+                                          <p:val>
+                                            <p:strVal val="#ppt_x"/>
+                                          </p:val>
+                                        </p:tav>
+                                      </p:tavLst>
+                                    </p:anim>
+                                    <p:anim calcmode="lin" valueType="num">
+                                      <p:cBhvr additive="base">
+                                        <p:cTn id="44" dur="500" fill="hold"/>
+                                        <p:tgtEl>
+                                          <p:spTgt spid="4">
+                                            <p:txEl>
+                                              <p:pRg st="5" end="5"/>
+                                            </p:txEl>
+                                          </p:spTgt>
+                                        </p:tgtEl>
+                                        <p:attrNameLst>
+                                          <p:attrName>ppt_y</p:attrName>
+                                        </p:attrNameLst>
+                                      </p:cBhvr>
+                                      <p:tavLst>
+                                        <p:tav tm="0">
+                                          <p:val>
+                                            <p:strVal val="1+#ppt_h/2"/>
+                                          </p:val>
+                                        </p:tav>
+                                        <p:tav tm="100000">
+                                          <p:val>
+                                            <p:strVal val="#ppt_y"/>
+                                          </p:val>
+                                        </p:tav>
+                                      </p:tavLst>
+                                    </p:anim>
+                                  </p:childTnLst>
+                                </p:cTn>
+                              </p:par>
+                            </p:childTnLst>
+                          </p:cTn>
+                        </p:par>
+                      </p:childTnLst>
+                    </p:cTn>
+                  </p:par>
+                  <p:par>
+                    <p:cTn id="45" fill="hold">
+                      <p:stCondLst>
+                        <p:cond delay="indefinite"/>
+                      </p:stCondLst>
+                      <p:childTnLst>
+                        <p:par>
+                          <p:cTn id="46" fill="hold">
+                            <p:stCondLst>
+                              <p:cond delay="0"/>
+                            </p:stCondLst>
+                            <p:childTnLst>
+                              <p:par>
+                                <p:cTn id="47" presetID="2" presetClass="entr" presetSubtype="4" fill="hold" nodeType="clickEffect">
+                                  <p:stCondLst>
+                                    <p:cond delay="0"/>
+                                  </p:stCondLst>
+                                  <p:childTnLst>
+                                    <p:set>
+                                      <p:cBhvr>
+                                        <p:cTn id="48" dur="1" fill="hold">
+                                          <p:stCondLst>
+                                            <p:cond delay="0"/>
+                                          </p:stCondLst>
+                                        </p:cTn>
+                                        <p:tgtEl>
+                                          <p:spTgt spid="4">
+                                            <p:txEl>
+                                              <p:pRg st="6" end="6"/>
+                                            </p:txEl>
+                                          </p:spTgt>
+                                        </p:tgtEl>
+                                        <p:attrNameLst>
+                                          <p:attrName>style.visibility</p:attrName>
+                                        </p:attrNameLst>
+                                      </p:cBhvr>
+                                      <p:to>
+                                        <p:strVal val="visible"/>
+                                      </p:to>
+                                    </p:set>
+                                    <p:anim calcmode="lin" valueType="num">
+                                      <p:cBhvr additive="base">
+                                        <p:cTn id="49" dur="500" fill="hold"/>
+                                        <p:tgtEl>
+                                          <p:spTgt spid="4">
+                                            <p:txEl>
+                                              <p:pRg st="6" end="6"/>
+                                            </p:txEl>
+                                          </p:spTgt>
+                                        </p:tgtEl>
+                                        <p:attrNameLst>
+                                          <p:attrName>ppt_x</p:attrName>
+                                        </p:attrNameLst>
+                                      </p:cBhvr>
+                                      <p:tavLst>
+                                        <p:tav tm="0">
+                                          <p:val>
+                                            <p:strVal val="#ppt_x"/>
+                                          </p:val>
+                                        </p:tav>
+                                        <p:tav tm="100000">
+                                          <p:val>
+                                            <p:strVal val="#ppt_x"/>
+                                          </p:val>
+                                        </p:tav>
+                                      </p:tavLst>
+                                    </p:anim>
+                                    <p:anim calcmode="lin" valueType="num">
+                                      <p:cBhvr additive="base">
+                                        <p:cTn id="50" dur="500" fill="hold"/>
+                                        <p:tgtEl>
+                                          <p:spTgt spid="4">
+                                            <p:txEl>
+                                              <p:pRg st="6" end="6"/>
+                                            </p:txEl>
+                                          </p:spTgt>
+                                        </p:tgtEl>
+                                        <p:attrNameLst>
+                                          <p:attrName>ppt_y</p:attrName>
+                                        </p:attrNameLst>
+                                      </p:cBhvr>
+                                      <p:tavLst>
+                                        <p:tav tm="0">
+                                          <p:val>
+                                            <p:strVal val="1+#ppt_h/2"/>
+                                          </p:val>
+                                        </p:tav>
+                                        <p:tav tm="100000">
+                                          <p:val>
+                                            <p:strVal val="#ppt_y"/>
+                                          </p:val>
+                                        </p:tav>
+                                      </p:tavLst>
+                                    </p:anim>
+                                  </p:childTnLst>
+                                </p:cTn>
+                              </p:par>
+                            </p:childTnLst>
+                          </p:cTn>
+                        </p:par>
+                      </p:childTnLst>
+                    </p:cTn>
+                  </p:par>
+                </p:childTnLst>
+              </p:cTn>
+              <p:prevCondLst>
+                <p:cond evt="onPrev" delay="0">
+                  <p:tgtEl>
+                    <p:sldTgt/>
+                  </p:tgtEl>
+                </p:cond>
+              </p:prevCondLst>
+              <p:nextCondLst>
+                <p:cond evt="onNext" delay="0">
+                  <p:tgtEl>
+                    <p:sldTgt/>
+                  </p:tgtEl>
+                </p:cond>
+              </p:nextCondLst>
+            </p:seq>
+          </p:childTnLst>
+        </p:cTn>
+      </p:par>
+    </p:tnLst>
+  </p:timing>
 </p:sld>
 </file>
 
 <file path=ppt/slides/slide5.xml><?xml version="1.0" encoding="utf-8"?>
+<p:sld xmlns:a="http://schemas.openxmlformats.org/drawingml/2006/main" xmlns:r="http://schemas.openxmlformats.org/officeDocument/2006/relationships" xmlns:p="http://schemas.openxmlformats.org/presentationml/2006/main">
+  <p:cSld>
+    <p:spTree>
+      <p:nvGrpSpPr>
+        <p:cNvPr id="1" name="">
+          <a:extLst>
+            <a:ext uri="{FF2B5EF4-FFF2-40B4-BE49-F238E27FC236}">
+              <a16:creationId xmlns:a16="http://schemas.microsoft.com/office/drawing/2014/main" id="{CDB1A503-E94E-167B-7F96-7E1F496C03D4}"/>
+            </a:ext>
+          </a:extLst>
+        </p:cNvPr>
+        <p:cNvGrpSpPr/>
+        <p:nvPr/>
+      </p:nvGrpSpPr>
+      <p:grpSpPr>
+        <a:xfrm>
+          <a:off x="0" y="0"/>
+          <a:ext cx="0" cy="0"/>
+          <a:chOff x="0" y="0"/>
+          <a:chExt cx="0" cy="0"/>
+        </a:xfrm>
+      </p:grpSpPr>
+      <p:sp>
+        <p:nvSpPr>
+          <p:cNvPr id="2" name="Cím 1">
+            <a:extLst>
+              <a:ext uri="{FF2B5EF4-FFF2-40B4-BE49-F238E27FC236}">
+                <a16:creationId xmlns:a16="http://schemas.microsoft.com/office/drawing/2014/main" id="{2888D14F-B150-E86F-B96D-4FE47616908C}"/>
+              </a:ext>
+            </a:extLst>
+          </p:cNvPr>
+          <p:cNvSpPr>
+            <a:spLocks noGrp="1"/>
+          </p:cNvSpPr>
+          <p:nvPr>
+            <p:ph type="title"/>
+          </p:nvPr>
+        </p:nvSpPr>
+        <p:spPr>
+          <a:xfrm>
+            <a:off x="221151" y="282192"/>
+            <a:ext cx="6019800" cy="1143000"/>
+          </a:xfrm>
+        </p:spPr>
+        <p:txBody>
+          <a:bodyPr/>
+          <a:lstStyle/>
+          <a:p>
+            <a:r>
+              <a:rPr lang="hu-HU" dirty="0"/>
+              <a:t>Fejlesztés és kódolás</a:t>
+            </a:r>
+          </a:p>
+        </p:txBody>
+      </p:sp>
+      <p:sp>
+        <p:nvSpPr>
+          <p:cNvPr id="4" name="Szöveg helye 3">
+            <a:extLst>
+              <a:ext uri="{FF2B5EF4-FFF2-40B4-BE49-F238E27FC236}">
+                <a16:creationId xmlns:a16="http://schemas.microsoft.com/office/drawing/2014/main" id="{CD66C371-1D2C-30C1-A115-136322B579DA}"/>
+              </a:ext>
+            </a:extLst>
+          </p:cNvPr>
+          <p:cNvSpPr>
+            <a:spLocks noGrp="1"/>
+          </p:cNvSpPr>
+          <p:nvPr>
+            <p:ph type="body" sz="half" idx="2"/>
+          </p:nvPr>
+        </p:nvSpPr>
+        <p:spPr>
+          <a:xfrm>
+            <a:off x="221151" y="1425192"/>
+            <a:ext cx="6021388" cy="5045946"/>
+          </a:xfrm>
+        </p:spPr>
+        <p:txBody>
+          <a:bodyPr>
+            <a:normAutofit/>
+          </a:bodyPr>
+          <a:lstStyle/>
+          <a:p>
+            <a:pPr marL="342900" indent="-342900">
+              <a:buFont typeface="Arial" panose="020B0604020202020204" pitchFamily="34" charset="0"/>
+              <a:buChar char="•"/>
+            </a:pPr>
+            <a:r>
+              <a:rPr lang="hu-HU" sz="2500" dirty="0">
+                <a:solidFill>
+                  <a:schemeClr val="tx1"/>
+                </a:solidFill>
+              </a:rPr>
+              <a:t>GUI - adatok bevitelére</a:t>
+            </a:r>
+          </a:p>
+          <a:p>
+            <a:pPr marL="800100" lvl="1" indent="-342900">
+              <a:buFont typeface="Arial" panose="020B0604020202020204" pitchFamily="34" charset="0"/>
+              <a:buChar char="•"/>
+            </a:pPr>
+            <a:r>
+              <a:rPr lang="hu-HU" sz="1900" dirty="0">
+                <a:solidFill>
+                  <a:schemeClr val="tx1"/>
+                </a:solidFill>
+              </a:rPr>
+              <a:t>Feszültség</a:t>
+            </a:r>
+          </a:p>
+          <a:p>
+            <a:pPr marL="800100" lvl="1" indent="-342900">
+              <a:buFont typeface="Arial" panose="020B0604020202020204" pitchFamily="34" charset="0"/>
+              <a:buChar char="•"/>
+            </a:pPr>
+            <a:r>
+              <a:rPr lang="hu-HU" sz="1900" dirty="0">
+                <a:solidFill>
+                  <a:schemeClr val="tx1"/>
+                </a:solidFill>
+              </a:rPr>
+              <a:t>Csillapítás</a:t>
+            </a:r>
+          </a:p>
+          <a:p>
+            <a:pPr marL="800100" lvl="1" indent="-342900">
+              <a:buFont typeface="Arial" panose="020B0604020202020204" pitchFamily="34" charset="0"/>
+              <a:buChar char="•"/>
+            </a:pPr>
+            <a:r>
+              <a:rPr lang="hu-HU" sz="1900" dirty="0">
+                <a:solidFill>
+                  <a:schemeClr val="tx1"/>
+                </a:solidFill>
+              </a:rPr>
+              <a:t>Később (</a:t>
+            </a:r>
+            <a:r>
+              <a:rPr lang="hu-HU" sz="1900" dirty="0" err="1">
+                <a:solidFill>
+                  <a:schemeClr val="tx1"/>
+                </a:solidFill>
+              </a:rPr>
+              <a:t>áramerrősség</a:t>
+            </a:r>
+            <a:r>
+              <a:rPr lang="hu-HU" sz="1900" dirty="0">
+                <a:solidFill>
+                  <a:schemeClr val="tx1"/>
+                </a:solidFill>
+              </a:rPr>
+              <a:t>, fényforrás)</a:t>
+            </a:r>
+          </a:p>
+          <a:p>
+            <a:pPr marL="800100" lvl="1" indent="-342900">
+              <a:buFont typeface="Arial" panose="020B0604020202020204" pitchFamily="34" charset="0"/>
+              <a:buChar char="•"/>
+            </a:pPr>
+            <a:r>
+              <a:rPr lang="hu-HU" sz="1900" dirty="0">
+                <a:solidFill>
+                  <a:schemeClr val="tx1"/>
+                </a:solidFill>
+              </a:rPr>
+              <a:t>Adat gyűjtés</a:t>
+            </a:r>
+          </a:p>
+          <a:p>
+            <a:pPr marL="342900" indent="-342900">
+              <a:buFont typeface="Arial" panose="020B0604020202020204" pitchFamily="34" charset="0"/>
+              <a:buChar char="•"/>
+            </a:pPr>
+            <a:r>
+              <a:rPr lang="hu-HU" sz="2500" dirty="0">
+                <a:solidFill>
+                  <a:schemeClr val="tx1"/>
+                </a:solidFill>
+              </a:rPr>
+              <a:t>Táp egység vezérlés tesztelő</a:t>
+            </a:r>
+          </a:p>
+          <a:p>
+            <a:pPr marL="800100" lvl="1" indent="-342900">
+              <a:buFont typeface="Arial" panose="020B0604020202020204" pitchFamily="34" charset="0"/>
+              <a:buChar char="•"/>
+            </a:pPr>
+            <a:r>
+              <a:rPr lang="hu-HU" sz="1900" dirty="0" err="1">
+                <a:solidFill>
+                  <a:schemeClr val="tx1"/>
+                </a:solidFill>
+              </a:rPr>
+              <a:t>Console</a:t>
+            </a:r>
+            <a:r>
+              <a:rPr lang="hu-HU" sz="1900" dirty="0">
+                <a:solidFill>
+                  <a:schemeClr val="tx1"/>
+                </a:solidFill>
+              </a:rPr>
+              <a:t> parancsok</a:t>
+            </a:r>
+          </a:p>
+          <a:p>
+            <a:pPr marL="800100" lvl="1" indent="-342900">
+              <a:buFont typeface="Arial" panose="020B0604020202020204" pitchFamily="34" charset="0"/>
+              <a:buChar char="•"/>
+            </a:pPr>
+            <a:r>
+              <a:rPr lang="hu-HU" sz="1900" dirty="0">
+                <a:solidFill>
+                  <a:schemeClr val="tx1"/>
+                </a:solidFill>
+              </a:rPr>
+              <a:t>Gyors tesztelés</a:t>
+            </a:r>
+          </a:p>
+        </p:txBody>
+      </p:sp>
+      <p:pic>
+        <p:nvPicPr>
+          <p:cNvPr id="8" name="Kép 7">
+            <a:extLst>
+              <a:ext uri="{FF2B5EF4-FFF2-40B4-BE49-F238E27FC236}">
+                <a16:creationId xmlns:a16="http://schemas.microsoft.com/office/drawing/2014/main" id="{E1822535-5EE4-3596-78FF-0C1FE4AD6823}"/>
+              </a:ext>
+            </a:extLst>
+          </p:cNvPr>
+          <p:cNvPicPr>
+            <a:picLocks noChangeAspect="1"/>
+          </p:cNvPicPr>
+          <p:nvPr/>
+        </p:nvPicPr>
+        <p:blipFill>
+          <a:blip r:embed="rId2"/>
+          <a:stretch>
+            <a:fillRect/>
+          </a:stretch>
+        </p:blipFill>
+        <p:spPr>
+          <a:xfrm>
+            <a:off x="5140685" y="566928"/>
+            <a:ext cx="7051315" cy="5724144"/>
+          </a:xfrm>
+          <a:prstGeom prst="rect">
+            <a:avLst/>
+          </a:prstGeom>
+        </p:spPr>
+      </p:pic>
+    </p:spTree>
+    <p:extLst>
+      <p:ext uri="{BB962C8B-B14F-4D97-AF65-F5344CB8AC3E}">
+        <p14:creationId xmlns:p14="http://schemas.microsoft.com/office/powerpoint/2010/main" val="1253751127"/>
+      </p:ext>
+    </p:extLst>
+  </p:cSld>
+  <p:clrMapOvr>
+    <a:masterClrMapping/>
+  </p:clrMapOvr>
+  <p:timing>
+    <p:tnLst>
+      <p:par>
+        <p:cTn id="1" dur="indefinite" restart="never" nodeType="tmRoot">
+          <p:childTnLst>
+            <p:seq concurrent="1" nextAc="seek">
+              <p:cTn id="2" dur="indefinite" nodeType="mainSeq">
+                <p:childTnLst>
+                  <p:par>
+                    <p:cTn id="3" fill="hold">
+                      <p:stCondLst>
+                        <p:cond delay="indefinite"/>
+                      </p:stCondLst>
+                      <p:childTnLst>
+                        <p:par>
+                          <p:cTn id="4" fill="hold">
+                            <p:stCondLst>
+                              <p:cond delay="0"/>
+                            </p:stCondLst>
+                            <p:childTnLst>
+                              <p:par>
+                                <p:cTn id="5" presetID="2" presetClass="entr" presetSubtype="4" fill="hold" nodeType="clickEffect">
+                                  <p:stCondLst>
+                                    <p:cond delay="0"/>
+                                  </p:stCondLst>
+                                  <p:childTnLst>
+                                    <p:set>
+                                      <p:cBhvr>
+                                        <p:cTn id="6" dur="1" fill="hold">
+                                          <p:stCondLst>
+                                            <p:cond delay="0"/>
+                                          </p:stCondLst>
+                                        </p:cTn>
+                                        <p:tgtEl>
+                                          <p:spTgt spid="4">
+                                            <p:txEl>
+                                              <p:pRg st="0" end="0"/>
+                                            </p:txEl>
+                                          </p:spTgt>
+                                        </p:tgtEl>
+                                        <p:attrNameLst>
+                                          <p:attrName>style.visibility</p:attrName>
+                                        </p:attrNameLst>
+                                      </p:cBhvr>
+                                      <p:to>
+                                        <p:strVal val="visible"/>
+                                      </p:to>
+                                    </p:set>
+                                    <p:anim calcmode="lin" valueType="num">
+                                      <p:cBhvr additive="base">
+                                        <p:cTn id="7" dur="500" fill="hold"/>
+                                        <p:tgtEl>
+                                          <p:spTgt spid="4">
+                                            <p:txEl>
+                                              <p:pRg st="0" end="0"/>
+                                            </p:txEl>
+                                          </p:spTgt>
+                                        </p:tgtEl>
+                                        <p:attrNameLst>
+                                          <p:attrName>ppt_x</p:attrName>
+                                        </p:attrNameLst>
+                                      </p:cBhvr>
+                                      <p:tavLst>
+                                        <p:tav tm="0">
+                                          <p:val>
+                                            <p:strVal val="#ppt_x"/>
+                                          </p:val>
+                                        </p:tav>
+                                        <p:tav tm="100000">
+                                          <p:val>
+                                            <p:strVal val="#ppt_x"/>
+                                          </p:val>
+                                        </p:tav>
+                                      </p:tavLst>
+                                    </p:anim>
+                                    <p:anim calcmode="lin" valueType="num">
+                                      <p:cBhvr additive="base">
+                                        <p:cTn id="8" dur="500" fill="hold"/>
+                                        <p:tgtEl>
+                                          <p:spTgt spid="4">
+                                            <p:txEl>
+                                              <p:pRg st="0" end="0"/>
+                                            </p:txEl>
+                                          </p:spTgt>
+                                        </p:tgtEl>
+                                        <p:attrNameLst>
+                                          <p:attrName>ppt_y</p:attrName>
+                                        </p:attrNameLst>
+                                      </p:cBhvr>
+                                      <p:tavLst>
+                                        <p:tav tm="0">
+                                          <p:val>
+                                            <p:strVal val="1+#ppt_h/2"/>
+                                          </p:val>
+                                        </p:tav>
+                                        <p:tav tm="100000">
+                                          <p:val>
+                                            <p:strVal val="#ppt_y"/>
+                                          </p:val>
+                                        </p:tav>
+                                      </p:tavLst>
+                                    </p:anim>
+                                  </p:childTnLst>
+                                </p:cTn>
+                              </p:par>
+                            </p:childTnLst>
+                          </p:cTn>
+                        </p:par>
+                      </p:childTnLst>
+                    </p:cTn>
+                  </p:par>
+                  <p:par>
+                    <p:cTn id="9" fill="hold">
+                      <p:stCondLst>
+                        <p:cond delay="indefinite"/>
+                      </p:stCondLst>
+                      <p:childTnLst>
+                        <p:par>
+                          <p:cTn id="10" fill="hold">
+                            <p:stCondLst>
+                              <p:cond delay="0"/>
+                            </p:stCondLst>
+                            <p:childTnLst>
+                              <p:par>
+                                <p:cTn id="11" presetID="2" presetClass="entr" presetSubtype="4" fill="hold" nodeType="clickEffect">
+                                  <p:stCondLst>
+                                    <p:cond delay="0"/>
+                                  </p:stCondLst>
+                                  <p:childTnLst>
+                                    <p:set>
+                                      <p:cBhvr>
+                                        <p:cTn id="12" dur="1" fill="hold">
+                                          <p:stCondLst>
+                                            <p:cond delay="0"/>
+                                          </p:stCondLst>
+                                        </p:cTn>
+                                        <p:tgtEl>
+                                          <p:spTgt spid="8"/>
+                                        </p:tgtEl>
+                                        <p:attrNameLst>
+                                          <p:attrName>style.visibility</p:attrName>
+                                        </p:attrNameLst>
+                                      </p:cBhvr>
+                                      <p:to>
+                                        <p:strVal val="visible"/>
+                                      </p:to>
+                                    </p:set>
+                                    <p:anim calcmode="lin" valueType="num">
+                                      <p:cBhvr additive="base">
+                                        <p:cTn id="13" dur="500" fill="hold"/>
+                                        <p:tgtEl>
+                                          <p:spTgt spid="8"/>
+                                        </p:tgtEl>
+                                        <p:attrNameLst>
+                                          <p:attrName>ppt_x</p:attrName>
+                                        </p:attrNameLst>
+                                      </p:cBhvr>
+                                      <p:tavLst>
+                                        <p:tav tm="0">
+                                          <p:val>
+                                            <p:strVal val="#ppt_x"/>
+                                          </p:val>
+                                        </p:tav>
+                                        <p:tav tm="100000">
+                                          <p:val>
+                                            <p:strVal val="#ppt_x"/>
+                                          </p:val>
+                                        </p:tav>
+                                      </p:tavLst>
+                                    </p:anim>
+                                    <p:anim calcmode="lin" valueType="num">
+                                      <p:cBhvr additive="base">
+                                        <p:cTn id="14" dur="500" fill="hold"/>
+                                        <p:tgtEl>
+                                          <p:spTgt spid="8"/>
+                                        </p:tgtEl>
+                                        <p:attrNameLst>
+                                          <p:attrName>ppt_y</p:attrName>
+                                        </p:attrNameLst>
+                                      </p:cBhvr>
+                                      <p:tavLst>
+                                        <p:tav tm="0">
+                                          <p:val>
+                                            <p:strVal val="1+#ppt_h/2"/>
+                                          </p:val>
+                                        </p:tav>
+                                        <p:tav tm="100000">
+                                          <p:val>
+                                            <p:strVal val="#ppt_y"/>
+                                          </p:val>
+                                        </p:tav>
+                                      </p:tavLst>
+                                    </p:anim>
+                                  </p:childTnLst>
+                                </p:cTn>
+                              </p:par>
+                              <p:par>
+                                <p:cTn id="15" presetID="2" presetClass="entr" presetSubtype="4" fill="hold" nodeType="withEffect">
+                                  <p:stCondLst>
+                                    <p:cond delay="0"/>
+                                  </p:stCondLst>
+                                  <p:childTnLst>
+                                    <p:set>
+                                      <p:cBhvr>
+                                        <p:cTn id="16" dur="1" fill="hold">
+                                          <p:stCondLst>
+                                            <p:cond delay="0"/>
+                                          </p:stCondLst>
+                                        </p:cTn>
+                                        <p:tgtEl>
+                                          <p:spTgt spid="4">
+                                            <p:txEl>
+                                              <p:pRg st="1" end="1"/>
+                                            </p:txEl>
+                                          </p:spTgt>
+                                        </p:tgtEl>
+                                        <p:attrNameLst>
+                                          <p:attrName>style.visibility</p:attrName>
+                                        </p:attrNameLst>
+                                      </p:cBhvr>
+                                      <p:to>
+                                        <p:strVal val="visible"/>
+                                      </p:to>
+                                    </p:set>
+                                    <p:anim calcmode="lin" valueType="num">
+                                      <p:cBhvr additive="base">
+                                        <p:cTn id="17" dur="500" fill="hold"/>
+                                        <p:tgtEl>
+                                          <p:spTgt spid="4">
+                                            <p:txEl>
+                                              <p:pRg st="1" end="1"/>
+                                            </p:txEl>
+                                          </p:spTgt>
+                                        </p:tgtEl>
+                                        <p:attrNameLst>
+                                          <p:attrName>ppt_x</p:attrName>
+                                        </p:attrNameLst>
+                                      </p:cBhvr>
+                                      <p:tavLst>
+                                        <p:tav tm="0">
+                                          <p:val>
+                                            <p:strVal val="#ppt_x"/>
+                                          </p:val>
+                                        </p:tav>
+                                        <p:tav tm="100000">
+                                          <p:val>
+                                            <p:strVal val="#ppt_x"/>
+                                          </p:val>
+                                        </p:tav>
+                                      </p:tavLst>
+                                    </p:anim>
+                                    <p:anim calcmode="lin" valueType="num">
+                                      <p:cBhvr additive="base">
+                                        <p:cTn id="18" dur="500" fill="hold"/>
+                                        <p:tgtEl>
+                                          <p:spTgt spid="4">
+                                            <p:txEl>
+                                              <p:pRg st="1" end="1"/>
+                                            </p:txEl>
+                                          </p:spTgt>
+                                        </p:tgtEl>
+                                        <p:attrNameLst>
+                                          <p:attrName>ppt_y</p:attrName>
+                                        </p:attrNameLst>
+                                      </p:cBhvr>
+                                      <p:tavLst>
+                                        <p:tav tm="0">
+                                          <p:val>
+                                            <p:strVal val="1+#ppt_h/2"/>
+                                          </p:val>
+                                        </p:tav>
+                                        <p:tav tm="100000">
+                                          <p:val>
+                                            <p:strVal val="#ppt_y"/>
+                                          </p:val>
+                                        </p:tav>
+                                      </p:tavLst>
+                                    </p:anim>
+                                  </p:childTnLst>
+                                </p:cTn>
+                              </p:par>
+                              <p:par>
+                                <p:cTn id="19" presetID="2" presetClass="entr" presetSubtype="4" fill="hold" nodeType="withEffect">
+                                  <p:stCondLst>
+                                    <p:cond delay="0"/>
+                                  </p:stCondLst>
+                                  <p:childTnLst>
+                                    <p:set>
+                                      <p:cBhvr>
+                                        <p:cTn id="20" dur="1" fill="hold">
+                                          <p:stCondLst>
+                                            <p:cond delay="0"/>
+                                          </p:stCondLst>
+                                        </p:cTn>
+                                        <p:tgtEl>
+                                          <p:spTgt spid="4">
+                                            <p:txEl>
+                                              <p:pRg st="2" end="2"/>
+                                            </p:txEl>
+                                          </p:spTgt>
+                                        </p:tgtEl>
+                                        <p:attrNameLst>
+                                          <p:attrName>style.visibility</p:attrName>
+                                        </p:attrNameLst>
+                                      </p:cBhvr>
+                                      <p:to>
+                                        <p:strVal val="visible"/>
+                                      </p:to>
+                                    </p:set>
+                                    <p:anim calcmode="lin" valueType="num">
+                                      <p:cBhvr additive="base">
+                                        <p:cTn id="21" dur="500" fill="hold"/>
+                                        <p:tgtEl>
+                                          <p:spTgt spid="4">
+                                            <p:txEl>
+                                              <p:pRg st="2" end="2"/>
+                                            </p:txEl>
+                                          </p:spTgt>
+                                        </p:tgtEl>
+                                        <p:attrNameLst>
+                                          <p:attrName>ppt_x</p:attrName>
+                                        </p:attrNameLst>
+                                      </p:cBhvr>
+                                      <p:tavLst>
+                                        <p:tav tm="0">
+                                          <p:val>
+                                            <p:strVal val="#ppt_x"/>
+                                          </p:val>
+                                        </p:tav>
+                                        <p:tav tm="100000">
+                                          <p:val>
+                                            <p:strVal val="#ppt_x"/>
+                                          </p:val>
+                                        </p:tav>
+                                      </p:tavLst>
+                                    </p:anim>
+                                    <p:anim calcmode="lin" valueType="num">
+                                      <p:cBhvr additive="base">
+                                        <p:cTn id="22" dur="500" fill="hold"/>
+                                        <p:tgtEl>
+                                          <p:spTgt spid="4">
+                                            <p:txEl>
+                                              <p:pRg st="2" end="2"/>
+                                            </p:txEl>
+                                          </p:spTgt>
+                                        </p:tgtEl>
+                                        <p:attrNameLst>
+                                          <p:attrName>ppt_y</p:attrName>
+                                        </p:attrNameLst>
+                                      </p:cBhvr>
+                                      <p:tavLst>
+                                        <p:tav tm="0">
+                                          <p:val>
+                                            <p:strVal val="1+#ppt_h/2"/>
+                                          </p:val>
+                                        </p:tav>
+                                        <p:tav tm="100000">
+                                          <p:val>
+                                            <p:strVal val="#ppt_y"/>
+                                          </p:val>
+                                        </p:tav>
+                                      </p:tavLst>
+                                    </p:anim>
+                                  </p:childTnLst>
+                                </p:cTn>
+                              </p:par>
+                              <p:par>
+                                <p:cTn id="23" presetID="2" presetClass="entr" presetSubtype="4" fill="hold" nodeType="withEffect">
+                                  <p:stCondLst>
+                                    <p:cond delay="0"/>
+                                  </p:stCondLst>
+                                  <p:childTnLst>
+                                    <p:set>
+                                      <p:cBhvr>
+                                        <p:cTn id="24" dur="1" fill="hold">
+                                          <p:stCondLst>
+                                            <p:cond delay="0"/>
+                                          </p:stCondLst>
+                                        </p:cTn>
+                                        <p:tgtEl>
+                                          <p:spTgt spid="4">
+                                            <p:txEl>
+                                              <p:pRg st="3" end="3"/>
+                                            </p:txEl>
+                                          </p:spTgt>
+                                        </p:tgtEl>
+                                        <p:attrNameLst>
+                                          <p:attrName>style.visibility</p:attrName>
+                                        </p:attrNameLst>
+                                      </p:cBhvr>
+                                      <p:to>
+                                        <p:strVal val="visible"/>
+                                      </p:to>
+                                    </p:set>
+                                    <p:anim calcmode="lin" valueType="num">
+                                      <p:cBhvr additive="base">
+                                        <p:cTn id="25" dur="500" fill="hold"/>
+                                        <p:tgtEl>
+                                          <p:spTgt spid="4">
+                                            <p:txEl>
+                                              <p:pRg st="3" end="3"/>
+                                            </p:txEl>
+                                          </p:spTgt>
+                                        </p:tgtEl>
+                                        <p:attrNameLst>
+                                          <p:attrName>ppt_x</p:attrName>
+                                        </p:attrNameLst>
+                                      </p:cBhvr>
+                                      <p:tavLst>
+                                        <p:tav tm="0">
+                                          <p:val>
+                                            <p:strVal val="#ppt_x"/>
+                                          </p:val>
+                                        </p:tav>
+                                        <p:tav tm="100000">
+                                          <p:val>
+                                            <p:strVal val="#ppt_x"/>
+                                          </p:val>
+                                        </p:tav>
+                                      </p:tavLst>
+                                    </p:anim>
+                                    <p:anim calcmode="lin" valueType="num">
+                                      <p:cBhvr additive="base">
+                                        <p:cTn id="26" dur="500" fill="hold"/>
+                                        <p:tgtEl>
+                                          <p:spTgt spid="4">
+                                            <p:txEl>
+                                              <p:pRg st="3" end="3"/>
+                                            </p:txEl>
+                                          </p:spTgt>
+                                        </p:tgtEl>
+                                        <p:attrNameLst>
+                                          <p:attrName>ppt_y</p:attrName>
+                                        </p:attrNameLst>
+                                      </p:cBhvr>
+                                      <p:tavLst>
+                                        <p:tav tm="0">
+                                          <p:val>
+                                            <p:strVal val="1+#ppt_h/2"/>
+                                          </p:val>
+                                        </p:tav>
+                                        <p:tav tm="100000">
+                                          <p:val>
+                                            <p:strVal val="#ppt_y"/>
+                                          </p:val>
+                                        </p:tav>
+                                      </p:tavLst>
+                                    </p:anim>
+                                  </p:childTnLst>
+                                </p:cTn>
+                              </p:par>
+                              <p:par>
+                                <p:cTn id="27" presetID="2" presetClass="entr" presetSubtype="4" fill="hold" nodeType="withEffect">
+                                  <p:stCondLst>
+                                    <p:cond delay="0"/>
+                                  </p:stCondLst>
+                                  <p:childTnLst>
+                                    <p:set>
+                                      <p:cBhvr>
+                                        <p:cTn id="28" dur="1" fill="hold">
+                                          <p:stCondLst>
+                                            <p:cond delay="0"/>
+                                          </p:stCondLst>
+                                        </p:cTn>
+                                        <p:tgtEl>
+                                          <p:spTgt spid="4">
+                                            <p:txEl>
+                                              <p:pRg st="4" end="4"/>
+                                            </p:txEl>
+                                          </p:spTgt>
+                                        </p:tgtEl>
+                                        <p:attrNameLst>
+                                          <p:attrName>style.visibility</p:attrName>
+                                        </p:attrNameLst>
+                                      </p:cBhvr>
+                                      <p:to>
+                                        <p:strVal val="visible"/>
+                                      </p:to>
+                                    </p:set>
+                                    <p:anim calcmode="lin" valueType="num">
+                                      <p:cBhvr additive="base">
+                                        <p:cTn id="29" dur="500" fill="hold"/>
+                                        <p:tgtEl>
+                                          <p:spTgt spid="4">
+                                            <p:txEl>
+                                              <p:pRg st="4" end="4"/>
+                                            </p:txEl>
+                                          </p:spTgt>
+                                        </p:tgtEl>
+                                        <p:attrNameLst>
+                                          <p:attrName>ppt_x</p:attrName>
+                                        </p:attrNameLst>
+                                      </p:cBhvr>
+                                      <p:tavLst>
+                                        <p:tav tm="0">
+                                          <p:val>
+                                            <p:strVal val="#ppt_x"/>
+                                          </p:val>
+                                        </p:tav>
+                                        <p:tav tm="100000">
+                                          <p:val>
+                                            <p:strVal val="#ppt_x"/>
+                                          </p:val>
+                                        </p:tav>
+                                      </p:tavLst>
+                                    </p:anim>
+                                    <p:anim calcmode="lin" valueType="num">
+                                      <p:cBhvr additive="base">
+                                        <p:cTn id="30" dur="500" fill="hold"/>
+                                        <p:tgtEl>
+                                          <p:spTgt spid="4">
+                                            <p:txEl>
+                                              <p:pRg st="4" end="4"/>
+                                            </p:txEl>
+                                          </p:spTgt>
+                                        </p:tgtEl>
+                                        <p:attrNameLst>
+                                          <p:attrName>ppt_y</p:attrName>
+                                        </p:attrNameLst>
+                                      </p:cBhvr>
+                                      <p:tavLst>
+                                        <p:tav tm="0">
+                                          <p:val>
+                                            <p:strVal val="1+#ppt_h/2"/>
+                                          </p:val>
+                                        </p:tav>
+                                        <p:tav tm="100000">
+                                          <p:val>
+                                            <p:strVal val="#ppt_y"/>
+                                          </p:val>
+                                        </p:tav>
+                                      </p:tavLst>
+                                    </p:anim>
+                                  </p:childTnLst>
+                                </p:cTn>
+                              </p:par>
+                            </p:childTnLst>
+                          </p:cTn>
+                        </p:par>
+                      </p:childTnLst>
+                    </p:cTn>
+                  </p:par>
+                  <p:par>
+                    <p:cTn id="31" fill="hold">
+                      <p:stCondLst>
+                        <p:cond delay="indefinite"/>
+                      </p:stCondLst>
+                      <p:childTnLst>
+                        <p:par>
+                          <p:cTn id="32" fill="hold">
+                            <p:stCondLst>
+                              <p:cond delay="0"/>
+                            </p:stCondLst>
+                            <p:childTnLst>
+                              <p:par>
+                                <p:cTn id="33" presetID="2" presetClass="entr" presetSubtype="4" fill="hold" nodeType="clickEffect">
+                                  <p:stCondLst>
+                                    <p:cond delay="0"/>
+                                  </p:stCondLst>
+                                  <p:childTnLst>
+                                    <p:set>
+                                      <p:cBhvr>
+                                        <p:cTn id="34" dur="1" fill="hold">
+                                          <p:stCondLst>
+                                            <p:cond delay="0"/>
+                                          </p:stCondLst>
+                                        </p:cTn>
+                                        <p:tgtEl>
+                                          <p:spTgt spid="4">
+                                            <p:txEl>
+                                              <p:pRg st="5" end="5"/>
+                                            </p:txEl>
+                                          </p:spTgt>
+                                        </p:tgtEl>
+                                        <p:attrNameLst>
+                                          <p:attrName>style.visibility</p:attrName>
+                                        </p:attrNameLst>
+                                      </p:cBhvr>
+                                      <p:to>
+                                        <p:strVal val="visible"/>
+                                      </p:to>
+                                    </p:set>
+                                    <p:anim calcmode="lin" valueType="num">
+                                      <p:cBhvr additive="base">
+                                        <p:cTn id="35" dur="500" fill="hold"/>
+                                        <p:tgtEl>
+                                          <p:spTgt spid="4">
+                                            <p:txEl>
+                                              <p:pRg st="5" end="5"/>
+                                            </p:txEl>
+                                          </p:spTgt>
+                                        </p:tgtEl>
+                                        <p:attrNameLst>
+                                          <p:attrName>ppt_x</p:attrName>
+                                        </p:attrNameLst>
+                                      </p:cBhvr>
+                                      <p:tavLst>
+                                        <p:tav tm="0">
+                                          <p:val>
+                                            <p:strVal val="#ppt_x"/>
+                                          </p:val>
+                                        </p:tav>
+                                        <p:tav tm="100000">
+                                          <p:val>
+                                            <p:strVal val="#ppt_x"/>
+                                          </p:val>
+                                        </p:tav>
+                                      </p:tavLst>
+                                    </p:anim>
+                                    <p:anim calcmode="lin" valueType="num">
+                                      <p:cBhvr additive="base">
+                                        <p:cTn id="36" dur="500" fill="hold"/>
+                                        <p:tgtEl>
+                                          <p:spTgt spid="4">
+                                            <p:txEl>
+                                              <p:pRg st="5" end="5"/>
+                                            </p:txEl>
+                                          </p:spTgt>
+                                        </p:tgtEl>
+                                        <p:attrNameLst>
+                                          <p:attrName>ppt_y</p:attrName>
+                                        </p:attrNameLst>
+                                      </p:cBhvr>
+                                      <p:tavLst>
+                                        <p:tav tm="0">
+                                          <p:val>
+                                            <p:strVal val="1+#ppt_h/2"/>
+                                          </p:val>
+                                        </p:tav>
+                                        <p:tav tm="100000">
+                                          <p:val>
+                                            <p:strVal val="#ppt_y"/>
+                                          </p:val>
+                                        </p:tav>
+                                      </p:tavLst>
+                                    </p:anim>
+                                  </p:childTnLst>
+                                </p:cTn>
+                              </p:par>
+                            </p:childTnLst>
+                          </p:cTn>
+                        </p:par>
+                      </p:childTnLst>
+                    </p:cTn>
+                  </p:par>
+                  <p:par>
+                    <p:cTn id="37" fill="hold">
+                      <p:stCondLst>
+                        <p:cond delay="indefinite"/>
+                      </p:stCondLst>
+                      <p:childTnLst>
+                        <p:par>
+                          <p:cTn id="38" fill="hold">
+                            <p:stCondLst>
+                              <p:cond delay="0"/>
+                            </p:stCondLst>
+                            <p:childTnLst>
+                              <p:par>
+                                <p:cTn id="39" presetID="2" presetClass="entr" presetSubtype="4" fill="hold" nodeType="clickEffect">
+                                  <p:stCondLst>
+                                    <p:cond delay="0"/>
+                                  </p:stCondLst>
+                                  <p:childTnLst>
+                                    <p:set>
+                                      <p:cBhvr>
+                                        <p:cTn id="40" dur="1" fill="hold">
+                                          <p:stCondLst>
+                                            <p:cond delay="0"/>
+                                          </p:stCondLst>
+                                        </p:cTn>
+                                        <p:tgtEl>
+                                          <p:spTgt spid="4">
+                                            <p:txEl>
+                                              <p:pRg st="6" end="6"/>
+                                            </p:txEl>
+                                          </p:spTgt>
+                                        </p:tgtEl>
+                                        <p:attrNameLst>
+                                          <p:attrName>style.visibility</p:attrName>
+                                        </p:attrNameLst>
+                                      </p:cBhvr>
+                                      <p:to>
+                                        <p:strVal val="visible"/>
+                                      </p:to>
+                                    </p:set>
+                                    <p:anim calcmode="lin" valueType="num">
+                                      <p:cBhvr additive="base">
+                                        <p:cTn id="41" dur="500" fill="hold"/>
+                                        <p:tgtEl>
+                                          <p:spTgt spid="4">
+                                            <p:txEl>
+                                              <p:pRg st="6" end="6"/>
+                                            </p:txEl>
+                                          </p:spTgt>
+                                        </p:tgtEl>
+                                        <p:attrNameLst>
+                                          <p:attrName>ppt_x</p:attrName>
+                                        </p:attrNameLst>
+                                      </p:cBhvr>
+                                      <p:tavLst>
+                                        <p:tav tm="0">
+                                          <p:val>
+                                            <p:strVal val="#ppt_x"/>
+                                          </p:val>
+                                        </p:tav>
+                                        <p:tav tm="100000">
+                                          <p:val>
+                                            <p:strVal val="#ppt_x"/>
+                                          </p:val>
+                                        </p:tav>
+                                      </p:tavLst>
+                                    </p:anim>
+                                    <p:anim calcmode="lin" valueType="num">
+                                      <p:cBhvr additive="base">
+                                        <p:cTn id="42" dur="500" fill="hold"/>
+                                        <p:tgtEl>
+                                          <p:spTgt spid="4">
+                                            <p:txEl>
+                                              <p:pRg st="6" end="6"/>
+                                            </p:txEl>
+                                          </p:spTgt>
+                                        </p:tgtEl>
+                                        <p:attrNameLst>
+                                          <p:attrName>ppt_y</p:attrName>
+                                        </p:attrNameLst>
+                                      </p:cBhvr>
+                                      <p:tavLst>
+                                        <p:tav tm="0">
+                                          <p:val>
+                                            <p:strVal val="1+#ppt_h/2"/>
+                                          </p:val>
+                                        </p:tav>
+                                        <p:tav tm="100000">
+                                          <p:val>
+                                            <p:strVal val="#ppt_y"/>
+                                          </p:val>
+                                        </p:tav>
+                                      </p:tavLst>
+                                    </p:anim>
+                                  </p:childTnLst>
+                                </p:cTn>
+                              </p:par>
+                              <p:par>
+                                <p:cTn id="43" presetID="2" presetClass="entr" presetSubtype="4" fill="hold" nodeType="withEffect">
+                                  <p:stCondLst>
+                                    <p:cond delay="0"/>
+                                  </p:stCondLst>
+                                  <p:childTnLst>
+                                    <p:set>
+                                      <p:cBhvr>
+                                        <p:cTn id="44" dur="1" fill="hold">
+                                          <p:stCondLst>
+                                            <p:cond delay="0"/>
+                                          </p:stCondLst>
+                                        </p:cTn>
+                                        <p:tgtEl>
+                                          <p:spTgt spid="4">
+                                            <p:txEl>
+                                              <p:pRg st="7" end="7"/>
+                                            </p:txEl>
+                                          </p:spTgt>
+                                        </p:tgtEl>
+                                        <p:attrNameLst>
+                                          <p:attrName>style.visibility</p:attrName>
+                                        </p:attrNameLst>
+                                      </p:cBhvr>
+                                      <p:to>
+                                        <p:strVal val="visible"/>
+                                      </p:to>
+                                    </p:set>
+                                    <p:anim calcmode="lin" valueType="num">
+                                      <p:cBhvr additive="base">
+                                        <p:cTn id="45" dur="500" fill="hold"/>
+                                        <p:tgtEl>
+                                          <p:spTgt spid="4">
+                                            <p:txEl>
+                                              <p:pRg st="7" end="7"/>
+                                            </p:txEl>
+                                          </p:spTgt>
+                                        </p:tgtEl>
+                                        <p:attrNameLst>
+                                          <p:attrName>ppt_x</p:attrName>
+                                        </p:attrNameLst>
+                                      </p:cBhvr>
+                                      <p:tavLst>
+                                        <p:tav tm="0">
+                                          <p:val>
+                                            <p:strVal val="#ppt_x"/>
+                                          </p:val>
+                                        </p:tav>
+                                        <p:tav tm="100000">
+                                          <p:val>
+                                            <p:strVal val="#ppt_x"/>
+                                          </p:val>
+                                        </p:tav>
+                                      </p:tavLst>
+                                    </p:anim>
+                                    <p:anim calcmode="lin" valueType="num">
+                                      <p:cBhvr additive="base">
+                                        <p:cTn id="46" dur="500" fill="hold"/>
+                                        <p:tgtEl>
+                                          <p:spTgt spid="4">
+                                            <p:txEl>
+                                              <p:pRg st="7" end="7"/>
+                                            </p:txEl>
+                                          </p:spTgt>
+                                        </p:tgtEl>
+                                        <p:attrNameLst>
+                                          <p:attrName>ppt_y</p:attrName>
+                                        </p:attrNameLst>
+                                      </p:cBhvr>
+                                      <p:tavLst>
+                                        <p:tav tm="0">
+                                          <p:val>
+                                            <p:strVal val="1+#ppt_h/2"/>
+                                          </p:val>
+                                        </p:tav>
+                                        <p:tav tm="100000">
+                                          <p:val>
+                                            <p:strVal val="#ppt_y"/>
+                                          </p:val>
+                                        </p:tav>
+                                      </p:tavLst>
+                                    </p:anim>
+                                  </p:childTnLst>
+                                </p:cTn>
+                              </p:par>
+                            </p:childTnLst>
+                          </p:cTn>
+                        </p:par>
+                      </p:childTnLst>
+                    </p:cTn>
+                  </p:par>
+                </p:childTnLst>
+              </p:cTn>
+              <p:prevCondLst>
+                <p:cond evt="onPrev" delay="0">
+                  <p:tgtEl>
+                    <p:sldTgt/>
+                  </p:tgtEl>
+                </p:cond>
+              </p:prevCondLst>
+              <p:nextCondLst>
+                <p:cond evt="onNext" delay="0">
+                  <p:tgtEl>
+                    <p:sldTgt/>
+                  </p:tgtEl>
+                </p:cond>
+              </p:nextCondLst>
+            </p:seq>
+          </p:childTnLst>
+        </p:cTn>
+      </p:par>
+    </p:tnLst>
+  </p:timing>
+</p:sld>
+</file>
+
+<file path=ppt/slides/slide6.xml><?xml version="1.0" encoding="utf-8"?>
 <p:sld xmlns:a="http://schemas.openxmlformats.org/drawingml/2006/main" xmlns:r="http://schemas.openxmlformats.org/officeDocument/2006/relationships" xmlns:p="http://schemas.openxmlformats.org/presentationml/2006/main">
   <p:cSld>
     <p:spTree>
@@ -7153,222 +10713,1555 @@
   <p:clrMapOvr>
     <a:masterClrMapping/>
   </p:clrMapOvr>
-</p:sld>
-</file>
-
-<file path=ppt/slides/slide6.xml><?xml version="1.0" encoding="utf-8"?>
-<p:sld xmlns:a="http://schemas.openxmlformats.org/drawingml/2006/main" xmlns:r="http://schemas.openxmlformats.org/officeDocument/2006/relationships" xmlns:p="http://schemas.openxmlformats.org/presentationml/2006/main">
-  <p:cSld>
-    <p:spTree>
-      <p:nvGrpSpPr>
-        <p:cNvPr id="1" name="">
-          <a:extLst>
-            <a:ext uri="{FF2B5EF4-FFF2-40B4-BE49-F238E27FC236}">
-              <a16:creationId xmlns:a16="http://schemas.microsoft.com/office/drawing/2014/main" id="{C920B21D-3CD5-5B02-20A5-E6B8473E7BE2}"/>
-            </a:ext>
-          </a:extLst>
-        </p:cNvPr>
-        <p:cNvGrpSpPr/>
-        <p:nvPr/>
-      </p:nvGrpSpPr>
-      <p:grpSpPr>
-        <a:xfrm>
-          <a:off x="0" y="0"/>
-          <a:ext cx="0" cy="0"/>
-          <a:chOff x="0" y="0"/>
-          <a:chExt cx="0" cy="0"/>
-        </a:xfrm>
-      </p:grpSpPr>
-      <p:sp>
-        <p:nvSpPr>
-          <p:cNvPr id="2" name="Cím 1">
-            <a:extLst>
-              <a:ext uri="{FF2B5EF4-FFF2-40B4-BE49-F238E27FC236}">
-                <a16:creationId xmlns:a16="http://schemas.microsoft.com/office/drawing/2014/main" id="{5F03C214-E5B0-FDD2-43F6-65864BDD3D4E}"/>
-              </a:ext>
-            </a:extLst>
-          </p:cNvPr>
-          <p:cNvSpPr>
-            <a:spLocks noGrp="1"/>
-          </p:cNvSpPr>
-          <p:nvPr>
-            <p:ph type="title"/>
-          </p:nvPr>
-        </p:nvSpPr>
-        <p:spPr>
-          <a:xfrm>
-            <a:off x="221151" y="282192"/>
-            <a:ext cx="6019800" cy="1143000"/>
-          </a:xfrm>
-        </p:spPr>
-        <p:txBody>
-          <a:bodyPr/>
-          <a:lstStyle/>
-          <a:p>
-            <a:r>
-              <a:rPr lang="hu-HU" dirty="0"/>
-              <a:t>Kérdések:</a:t>
-            </a:r>
-          </a:p>
-        </p:txBody>
-      </p:sp>
-      <p:sp>
-        <p:nvSpPr>
-          <p:cNvPr id="4" name="Szöveg helye 3">
-            <a:extLst>
-              <a:ext uri="{FF2B5EF4-FFF2-40B4-BE49-F238E27FC236}">
-                <a16:creationId xmlns:a16="http://schemas.microsoft.com/office/drawing/2014/main" id="{1783D9BB-BFF5-7759-2BE2-EEF45D9567DD}"/>
-              </a:ext>
-            </a:extLst>
-          </p:cNvPr>
-          <p:cNvSpPr>
-            <a:spLocks noGrp="1"/>
-          </p:cNvSpPr>
-          <p:nvPr>
-            <p:ph type="body" sz="half" idx="2"/>
-          </p:nvPr>
-        </p:nvSpPr>
-        <p:spPr>
-          <a:xfrm>
-            <a:off x="221150" y="1425192"/>
-            <a:ext cx="11263713" cy="1143000"/>
-          </a:xfrm>
-        </p:spPr>
-        <p:txBody>
-          <a:bodyPr>
-            <a:normAutofit lnSpcReduction="10000"/>
-          </a:bodyPr>
-          <a:lstStyle/>
-          <a:p>
-            <a:pPr marL="342900" indent="-342900">
-              <a:buAutoNum type="arabicPeriod"/>
-            </a:pPr>
-            <a:r>
-              <a:rPr lang="hu-HU" dirty="0">
-                <a:solidFill>
-                  <a:schemeClr val="tx1"/>
-                </a:solidFill>
-              </a:rPr>
-              <a:t>Minden SNSPD-</a:t>
-            </a:r>
-            <a:r>
-              <a:rPr lang="hu-HU" dirty="0" err="1">
-                <a:solidFill>
-                  <a:schemeClr val="tx1"/>
-                </a:solidFill>
-              </a:rPr>
-              <a:t>nek</a:t>
-            </a:r>
-            <a:r>
-              <a:rPr lang="hu-HU" dirty="0">
-                <a:solidFill>
-                  <a:schemeClr val="tx1"/>
-                </a:solidFill>
-              </a:rPr>
-              <a:t> más a </a:t>
-            </a:r>
-            <a:r>
-              <a:rPr lang="hu-HU" dirty="0" err="1">
-                <a:solidFill>
-                  <a:schemeClr val="tx1"/>
-                </a:solidFill>
-              </a:rPr>
-              <a:t>karakterizációja</a:t>
-            </a:r>
-            <a:r>
-              <a:rPr lang="hu-HU" dirty="0">
-                <a:solidFill>
-                  <a:schemeClr val="tx1"/>
-                </a:solidFill>
-              </a:rPr>
-              <a:t>?</a:t>
-            </a:r>
-          </a:p>
-          <a:p>
-            <a:pPr marL="342900" indent="-342900">
-              <a:buAutoNum type="arabicPeriod"/>
-            </a:pPr>
-            <a:r>
-              <a:rPr lang="hu-HU" dirty="0">
-                <a:solidFill>
-                  <a:schemeClr val="tx1"/>
-                </a:solidFill>
-              </a:rPr>
-              <a:t>Akkor minek egyre meghatározni?</a:t>
-            </a:r>
-          </a:p>
-          <a:p>
-            <a:pPr marL="342900" indent="-342900">
-              <a:buAutoNum type="arabicPeriod"/>
-            </a:pPr>
-            <a:r>
-              <a:rPr lang="hu-HU" dirty="0">
-                <a:solidFill>
-                  <a:schemeClr val="tx1"/>
-                </a:solidFill>
-              </a:rPr>
-              <a:t>Mi történik, ha túl erős fény (=túl sok foton) érkezik a bemeneten?</a:t>
-            </a:r>
-          </a:p>
-        </p:txBody>
-      </p:sp>
-      <p:pic>
-        <p:nvPicPr>
-          <p:cNvPr id="2050" name="Picture 2" descr="Tíz kérdés vár válaszra. Ne hagyd őket parlagon! Kvíz! - szavazo.hu">
-            <a:extLst>
-              <a:ext uri="{FF2B5EF4-FFF2-40B4-BE49-F238E27FC236}">
-                <a16:creationId xmlns:a16="http://schemas.microsoft.com/office/drawing/2014/main" id="{687CBCDC-2285-52C4-202C-87D6E270DDF7}"/>
-              </a:ext>
-            </a:extLst>
-          </p:cNvPr>
-          <p:cNvPicPr>
-            <a:picLocks noChangeAspect="1" noChangeArrowheads="1"/>
-          </p:cNvPicPr>
-          <p:nvPr/>
-        </p:nvPicPr>
-        <p:blipFill>
-          <a:blip r:embed="rId2">
-            <a:extLst>
-              <a:ext uri="{28A0092B-C50C-407E-A947-70E740481C1C}">
-                <a14:useLocalDpi xmlns:a14="http://schemas.microsoft.com/office/drawing/2010/main" val="0"/>
-              </a:ext>
-            </a:extLst>
-          </a:blip>
-          <a:srcRect/>
-          <a:stretch>
-            <a:fillRect/>
-          </a:stretch>
-        </p:blipFill>
-        <p:spPr bwMode="auto">
-          <a:xfrm>
-            <a:off x="3194762" y="2890157"/>
-            <a:ext cx="5802475" cy="3249386"/>
-          </a:xfrm>
-          <a:prstGeom prst="rect">
-            <a:avLst/>
-          </a:prstGeom>
-          <a:noFill/>
-          <a:extLst>
-            <a:ext uri="{909E8E84-426E-40DD-AFC4-6F175D3DCCD1}">
-              <a14:hiddenFill xmlns:a14="http://schemas.microsoft.com/office/drawing/2010/main">
-                <a:solidFill>
-                  <a:srgbClr val="FFFFFF"/>
-                </a:solidFill>
-              </a14:hiddenFill>
-            </a:ext>
-          </a:extLst>
-        </p:spPr>
-      </p:pic>
-    </p:spTree>
-    <p:extLst>
-      <p:ext uri="{BB962C8B-B14F-4D97-AF65-F5344CB8AC3E}">
-        <p14:creationId xmlns:p14="http://schemas.microsoft.com/office/powerpoint/2010/main" val="1675271170"/>
-      </p:ext>
-    </p:extLst>
-  </p:cSld>
-  <p:clrMapOvr>
-    <a:masterClrMapping/>
-  </p:clrMapOvr>
+  <p:timing>
+    <p:tnLst>
+      <p:par>
+        <p:cTn id="1" dur="indefinite" restart="never" nodeType="tmRoot">
+          <p:childTnLst>
+            <p:seq concurrent="1" nextAc="seek">
+              <p:cTn id="2" dur="indefinite" nodeType="mainSeq">
+                <p:childTnLst>
+                  <p:par>
+                    <p:cTn id="3" fill="hold">
+                      <p:stCondLst>
+                        <p:cond delay="indefinite"/>
+                      </p:stCondLst>
+                      <p:childTnLst>
+                        <p:par>
+                          <p:cTn id="4" fill="hold">
+                            <p:stCondLst>
+                              <p:cond delay="0"/>
+                            </p:stCondLst>
+                            <p:childTnLst>
+                              <p:par>
+                                <p:cTn id="5" presetID="2" presetClass="entr" presetSubtype="4" fill="hold" nodeType="clickEffect">
+                                  <p:stCondLst>
+                                    <p:cond delay="0"/>
+                                  </p:stCondLst>
+                                  <p:childTnLst>
+                                    <p:set>
+                                      <p:cBhvr>
+                                        <p:cTn id="6" dur="1" fill="hold">
+                                          <p:stCondLst>
+                                            <p:cond delay="0"/>
+                                          </p:stCondLst>
+                                        </p:cTn>
+                                        <p:tgtEl>
+                                          <p:spTgt spid="4">
+                                            <p:txEl>
+                                              <p:pRg st="0" end="0"/>
+                                            </p:txEl>
+                                          </p:spTgt>
+                                        </p:tgtEl>
+                                        <p:attrNameLst>
+                                          <p:attrName>style.visibility</p:attrName>
+                                        </p:attrNameLst>
+                                      </p:cBhvr>
+                                      <p:to>
+                                        <p:strVal val="visible"/>
+                                      </p:to>
+                                    </p:set>
+                                    <p:anim calcmode="lin" valueType="num">
+                                      <p:cBhvr additive="base">
+                                        <p:cTn id="7" dur="500" fill="hold"/>
+                                        <p:tgtEl>
+                                          <p:spTgt spid="4">
+                                            <p:txEl>
+                                              <p:pRg st="0" end="0"/>
+                                            </p:txEl>
+                                          </p:spTgt>
+                                        </p:tgtEl>
+                                        <p:attrNameLst>
+                                          <p:attrName>ppt_x</p:attrName>
+                                        </p:attrNameLst>
+                                      </p:cBhvr>
+                                      <p:tavLst>
+                                        <p:tav tm="0">
+                                          <p:val>
+                                            <p:strVal val="#ppt_x"/>
+                                          </p:val>
+                                        </p:tav>
+                                        <p:tav tm="100000">
+                                          <p:val>
+                                            <p:strVal val="#ppt_x"/>
+                                          </p:val>
+                                        </p:tav>
+                                      </p:tavLst>
+                                    </p:anim>
+                                    <p:anim calcmode="lin" valueType="num">
+                                      <p:cBhvr additive="base">
+                                        <p:cTn id="8" dur="500" fill="hold"/>
+                                        <p:tgtEl>
+                                          <p:spTgt spid="4">
+                                            <p:txEl>
+                                              <p:pRg st="0" end="0"/>
+                                            </p:txEl>
+                                          </p:spTgt>
+                                        </p:tgtEl>
+                                        <p:attrNameLst>
+                                          <p:attrName>ppt_y</p:attrName>
+                                        </p:attrNameLst>
+                                      </p:cBhvr>
+                                      <p:tavLst>
+                                        <p:tav tm="0">
+                                          <p:val>
+                                            <p:strVal val="1+#ppt_h/2"/>
+                                          </p:val>
+                                        </p:tav>
+                                        <p:tav tm="100000">
+                                          <p:val>
+                                            <p:strVal val="#ppt_y"/>
+                                          </p:val>
+                                        </p:tav>
+                                      </p:tavLst>
+                                    </p:anim>
+                                  </p:childTnLst>
+                                </p:cTn>
+                              </p:par>
+                            </p:childTnLst>
+                          </p:cTn>
+                        </p:par>
+                      </p:childTnLst>
+                    </p:cTn>
+                  </p:par>
+                  <p:par>
+                    <p:cTn id="9" fill="hold">
+                      <p:stCondLst>
+                        <p:cond delay="indefinite"/>
+                      </p:stCondLst>
+                      <p:childTnLst>
+                        <p:par>
+                          <p:cTn id="10" fill="hold">
+                            <p:stCondLst>
+                              <p:cond delay="0"/>
+                            </p:stCondLst>
+                            <p:childTnLst>
+                              <p:par>
+                                <p:cTn id="11" presetID="22" presetClass="entr" presetSubtype="4" fill="hold" grpId="0" nodeType="clickEffect">
+                                  <p:stCondLst>
+                                    <p:cond delay="0"/>
+                                  </p:stCondLst>
+                                  <p:childTnLst>
+                                    <p:set>
+                                      <p:cBhvr>
+                                        <p:cTn id="12" dur="1" fill="hold">
+                                          <p:stCondLst>
+                                            <p:cond delay="0"/>
+                                          </p:stCondLst>
+                                        </p:cTn>
+                                        <p:tgtEl>
+                                          <p:spTgt spid="9"/>
+                                        </p:tgtEl>
+                                        <p:attrNameLst>
+                                          <p:attrName>style.visibility</p:attrName>
+                                        </p:attrNameLst>
+                                      </p:cBhvr>
+                                      <p:to>
+                                        <p:strVal val="visible"/>
+                                      </p:to>
+                                    </p:set>
+                                    <p:animEffect transition="in" filter="wipe(down)">
+                                      <p:cBhvr>
+                                        <p:cTn id="13" dur="500"/>
+                                        <p:tgtEl>
+                                          <p:spTgt spid="9"/>
+                                        </p:tgtEl>
+                                      </p:cBhvr>
+                                    </p:animEffect>
+                                  </p:childTnLst>
+                                </p:cTn>
+                              </p:par>
+                            </p:childTnLst>
+                          </p:cTn>
+                        </p:par>
+                      </p:childTnLst>
+                    </p:cTn>
+                  </p:par>
+                  <p:par>
+                    <p:cTn id="14" fill="hold">
+                      <p:stCondLst>
+                        <p:cond delay="indefinite"/>
+                      </p:stCondLst>
+                      <p:childTnLst>
+                        <p:par>
+                          <p:cTn id="15" fill="hold">
+                            <p:stCondLst>
+                              <p:cond delay="0"/>
+                            </p:stCondLst>
+                            <p:childTnLst>
+                              <p:par>
+                                <p:cTn id="16" presetID="10" presetClass="entr" presetSubtype="0" fill="hold" nodeType="clickEffect">
+                                  <p:stCondLst>
+                                    <p:cond delay="0"/>
+                                  </p:stCondLst>
+                                  <p:childTnLst>
+                                    <p:set>
+                                      <p:cBhvr>
+                                        <p:cTn id="17" dur="1" fill="hold">
+                                          <p:stCondLst>
+                                            <p:cond delay="0"/>
+                                          </p:stCondLst>
+                                        </p:cTn>
+                                        <p:tgtEl>
+                                          <p:spTgt spid="6">
+                                            <p:txEl>
+                                              <p:pRg st="0" end="0"/>
+                                            </p:txEl>
+                                          </p:spTgt>
+                                        </p:tgtEl>
+                                        <p:attrNameLst>
+                                          <p:attrName>style.visibility</p:attrName>
+                                        </p:attrNameLst>
+                                      </p:cBhvr>
+                                      <p:to>
+                                        <p:strVal val="visible"/>
+                                      </p:to>
+                                    </p:set>
+                                    <p:animEffect transition="in" filter="fade">
+                                      <p:cBhvr>
+                                        <p:cTn id="18" dur="500"/>
+                                        <p:tgtEl>
+                                          <p:spTgt spid="6">
+                                            <p:txEl>
+                                              <p:pRg st="0" end="0"/>
+                                            </p:txEl>
+                                          </p:spTgt>
+                                        </p:tgtEl>
+                                      </p:cBhvr>
+                                    </p:animEffect>
+                                  </p:childTnLst>
+                                </p:cTn>
+                              </p:par>
+                            </p:childTnLst>
+                          </p:cTn>
+                        </p:par>
+                      </p:childTnLst>
+                    </p:cTn>
+                  </p:par>
+                  <p:par>
+                    <p:cTn id="19" fill="hold">
+                      <p:stCondLst>
+                        <p:cond delay="indefinite"/>
+                      </p:stCondLst>
+                      <p:childTnLst>
+                        <p:par>
+                          <p:cTn id="20" fill="hold">
+                            <p:stCondLst>
+                              <p:cond delay="0"/>
+                            </p:stCondLst>
+                            <p:childTnLst>
+                              <p:par>
+                                <p:cTn id="21" presetID="2" presetClass="entr" presetSubtype="4" fill="hold" nodeType="clickEffect">
+                                  <p:stCondLst>
+                                    <p:cond delay="0"/>
+                                  </p:stCondLst>
+                                  <p:childTnLst>
+                                    <p:set>
+                                      <p:cBhvr>
+                                        <p:cTn id="22" dur="1" fill="hold">
+                                          <p:stCondLst>
+                                            <p:cond delay="0"/>
+                                          </p:stCondLst>
+                                        </p:cTn>
+                                        <p:tgtEl>
+                                          <p:spTgt spid="4">
+                                            <p:txEl>
+                                              <p:pRg st="1" end="1"/>
+                                            </p:txEl>
+                                          </p:spTgt>
+                                        </p:tgtEl>
+                                        <p:attrNameLst>
+                                          <p:attrName>style.visibility</p:attrName>
+                                        </p:attrNameLst>
+                                      </p:cBhvr>
+                                      <p:to>
+                                        <p:strVal val="visible"/>
+                                      </p:to>
+                                    </p:set>
+                                    <p:anim calcmode="lin" valueType="num">
+                                      <p:cBhvr additive="base">
+                                        <p:cTn id="23" dur="500" fill="hold"/>
+                                        <p:tgtEl>
+                                          <p:spTgt spid="4">
+                                            <p:txEl>
+                                              <p:pRg st="1" end="1"/>
+                                            </p:txEl>
+                                          </p:spTgt>
+                                        </p:tgtEl>
+                                        <p:attrNameLst>
+                                          <p:attrName>ppt_x</p:attrName>
+                                        </p:attrNameLst>
+                                      </p:cBhvr>
+                                      <p:tavLst>
+                                        <p:tav tm="0">
+                                          <p:val>
+                                            <p:strVal val="#ppt_x"/>
+                                          </p:val>
+                                        </p:tav>
+                                        <p:tav tm="100000">
+                                          <p:val>
+                                            <p:strVal val="#ppt_x"/>
+                                          </p:val>
+                                        </p:tav>
+                                      </p:tavLst>
+                                    </p:anim>
+                                    <p:anim calcmode="lin" valueType="num">
+                                      <p:cBhvr additive="base">
+                                        <p:cTn id="24" dur="500" fill="hold"/>
+                                        <p:tgtEl>
+                                          <p:spTgt spid="4">
+                                            <p:txEl>
+                                              <p:pRg st="1" end="1"/>
+                                            </p:txEl>
+                                          </p:spTgt>
+                                        </p:tgtEl>
+                                        <p:attrNameLst>
+                                          <p:attrName>ppt_y</p:attrName>
+                                        </p:attrNameLst>
+                                      </p:cBhvr>
+                                      <p:tavLst>
+                                        <p:tav tm="0">
+                                          <p:val>
+                                            <p:strVal val="1+#ppt_h/2"/>
+                                          </p:val>
+                                        </p:tav>
+                                        <p:tav tm="100000">
+                                          <p:val>
+                                            <p:strVal val="#ppt_y"/>
+                                          </p:val>
+                                        </p:tav>
+                                      </p:tavLst>
+                                    </p:anim>
+                                  </p:childTnLst>
+                                </p:cTn>
+                              </p:par>
+                            </p:childTnLst>
+                          </p:cTn>
+                        </p:par>
+                      </p:childTnLst>
+                    </p:cTn>
+                  </p:par>
+                  <p:par>
+                    <p:cTn id="25" fill="hold">
+                      <p:stCondLst>
+                        <p:cond delay="indefinite"/>
+                      </p:stCondLst>
+                      <p:childTnLst>
+                        <p:par>
+                          <p:cTn id="26" fill="hold">
+                            <p:stCondLst>
+                              <p:cond delay="0"/>
+                            </p:stCondLst>
+                            <p:childTnLst>
+                              <p:par>
+                                <p:cTn id="27" presetID="22" presetClass="entr" presetSubtype="4" fill="hold" grpId="0" nodeType="clickEffect">
+                                  <p:stCondLst>
+                                    <p:cond delay="0"/>
+                                  </p:stCondLst>
+                                  <p:childTnLst>
+                                    <p:set>
+                                      <p:cBhvr>
+                                        <p:cTn id="28" dur="1" fill="hold">
+                                          <p:stCondLst>
+                                            <p:cond delay="0"/>
+                                          </p:stCondLst>
+                                        </p:cTn>
+                                        <p:tgtEl>
+                                          <p:spTgt spid="10"/>
+                                        </p:tgtEl>
+                                        <p:attrNameLst>
+                                          <p:attrName>style.visibility</p:attrName>
+                                        </p:attrNameLst>
+                                      </p:cBhvr>
+                                      <p:to>
+                                        <p:strVal val="visible"/>
+                                      </p:to>
+                                    </p:set>
+                                    <p:animEffect transition="in" filter="wipe(down)">
+                                      <p:cBhvr>
+                                        <p:cTn id="29" dur="500"/>
+                                        <p:tgtEl>
+                                          <p:spTgt spid="10"/>
+                                        </p:tgtEl>
+                                      </p:cBhvr>
+                                    </p:animEffect>
+                                  </p:childTnLst>
+                                </p:cTn>
+                              </p:par>
+                            </p:childTnLst>
+                          </p:cTn>
+                        </p:par>
+                      </p:childTnLst>
+                    </p:cTn>
+                  </p:par>
+                  <p:par>
+                    <p:cTn id="30" fill="hold">
+                      <p:stCondLst>
+                        <p:cond delay="indefinite"/>
+                      </p:stCondLst>
+                      <p:childTnLst>
+                        <p:par>
+                          <p:cTn id="31" fill="hold">
+                            <p:stCondLst>
+                              <p:cond delay="0"/>
+                            </p:stCondLst>
+                            <p:childTnLst>
+                              <p:par>
+                                <p:cTn id="32" presetID="10" presetClass="entr" presetSubtype="0" fill="hold" nodeType="clickEffect">
+                                  <p:stCondLst>
+                                    <p:cond delay="0"/>
+                                  </p:stCondLst>
+                                  <p:childTnLst>
+                                    <p:set>
+                                      <p:cBhvr>
+                                        <p:cTn id="33" dur="1" fill="hold">
+                                          <p:stCondLst>
+                                            <p:cond delay="0"/>
+                                          </p:stCondLst>
+                                        </p:cTn>
+                                        <p:tgtEl>
+                                          <p:spTgt spid="6">
+                                            <p:txEl>
+                                              <p:pRg st="1" end="1"/>
+                                            </p:txEl>
+                                          </p:spTgt>
+                                        </p:tgtEl>
+                                        <p:attrNameLst>
+                                          <p:attrName>style.visibility</p:attrName>
+                                        </p:attrNameLst>
+                                      </p:cBhvr>
+                                      <p:to>
+                                        <p:strVal val="visible"/>
+                                      </p:to>
+                                    </p:set>
+                                    <p:animEffect transition="in" filter="fade">
+                                      <p:cBhvr>
+                                        <p:cTn id="34" dur="500"/>
+                                        <p:tgtEl>
+                                          <p:spTgt spid="6">
+                                            <p:txEl>
+                                              <p:pRg st="1" end="1"/>
+                                            </p:txEl>
+                                          </p:spTgt>
+                                        </p:tgtEl>
+                                      </p:cBhvr>
+                                    </p:animEffect>
+                                  </p:childTnLst>
+                                </p:cTn>
+                              </p:par>
+                            </p:childTnLst>
+                          </p:cTn>
+                        </p:par>
+                      </p:childTnLst>
+                    </p:cTn>
+                  </p:par>
+                  <p:par>
+                    <p:cTn id="35" fill="hold">
+                      <p:stCondLst>
+                        <p:cond delay="indefinite"/>
+                      </p:stCondLst>
+                      <p:childTnLst>
+                        <p:par>
+                          <p:cTn id="36" fill="hold">
+                            <p:stCondLst>
+                              <p:cond delay="0"/>
+                            </p:stCondLst>
+                            <p:childTnLst>
+                              <p:par>
+                                <p:cTn id="37" presetID="2" presetClass="entr" presetSubtype="4" fill="hold" nodeType="clickEffect">
+                                  <p:stCondLst>
+                                    <p:cond delay="0"/>
+                                  </p:stCondLst>
+                                  <p:childTnLst>
+                                    <p:set>
+                                      <p:cBhvr>
+                                        <p:cTn id="38" dur="1" fill="hold">
+                                          <p:stCondLst>
+                                            <p:cond delay="0"/>
+                                          </p:stCondLst>
+                                        </p:cTn>
+                                        <p:tgtEl>
+                                          <p:spTgt spid="4">
+                                            <p:txEl>
+                                              <p:pRg st="2" end="2"/>
+                                            </p:txEl>
+                                          </p:spTgt>
+                                        </p:tgtEl>
+                                        <p:attrNameLst>
+                                          <p:attrName>style.visibility</p:attrName>
+                                        </p:attrNameLst>
+                                      </p:cBhvr>
+                                      <p:to>
+                                        <p:strVal val="visible"/>
+                                      </p:to>
+                                    </p:set>
+                                    <p:anim calcmode="lin" valueType="num">
+                                      <p:cBhvr additive="base">
+                                        <p:cTn id="39" dur="500" fill="hold"/>
+                                        <p:tgtEl>
+                                          <p:spTgt spid="4">
+                                            <p:txEl>
+                                              <p:pRg st="2" end="2"/>
+                                            </p:txEl>
+                                          </p:spTgt>
+                                        </p:tgtEl>
+                                        <p:attrNameLst>
+                                          <p:attrName>ppt_x</p:attrName>
+                                        </p:attrNameLst>
+                                      </p:cBhvr>
+                                      <p:tavLst>
+                                        <p:tav tm="0">
+                                          <p:val>
+                                            <p:strVal val="#ppt_x"/>
+                                          </p:val>
+                                        </p:tav>
+                                        <p:tav tm="100000">
+                                          <p:val>
+                                            <p:strVal val="#ppt_x"/>
+                                          </p:val>
+                                        </p:tav>
+                                      </p:tavLst>
+                                    </p:anim>
+                                    <p:anim calcmode="lin" valueType="num">
+                                      <p:cBhvr additive="base">
+                                        <p:cTn id="40" dur="500" fill="hold"/>
+                                        <p:tgtEl>
+                                          <p:spTgt spid="4">
+                                            <p:txEl>
+                                              <p:pRg st="2" end="2"/>
+                                            </p:txEl>
+                                          </p:spTgt>
+                                        </p:tgtEl>
+                                        <p:attrNameLst>
+                                          <p:attrName>ppt_y</p:attrName>
+                                        </p:attrNameLst>
+                                      </p:cBhvr>
+                                      <p:tavLst>
+                                        <p:tav tm="0">
+                                          <p:val>
+                                            <p:strVal val="1+#ppt_h/2"/>
+                                          </p:val>
+                                        </p:tav>
+                                        <p:tav tm="100000">
+                                          <p:val>
+                                            <p:strVal val="#ppt_y"/>
+                                          </p:val>
+                                        </p:tav>
+                                      </p:tavLst>
+                                    </p:anim>
+                                  </p:childTnLst>
+                                </p:cTn>
+                              </p:par>
+                            </p:childTnLst>
+                          </p:cTn>
+                        </p:par>
+                      </p:childTnLst>
+                    </p:cTn>
+                  </p:par>
+                  <p:par>
+                    <p:cTn id="41" fill="hold">
+                      <p:stCondLst>
+                        <p:cond delay="indefinite"/>
+                      </p:stCondLst>
+                      <p:childTnLst>
+                        <p:par>
+                          <p:cTn id="42" fill="hold">
+                            <p:stCondLst>
+                              <p:cond delay="0"/>
+                            </p:stCondLst>
+                            <p:childTnLst>
+                              <p:par>
+                                <p:cTn id="43" presetID="22" presetClass="entr" presetSubtype="4" fill="hold" grpId="0" nodeType="clickEffect">
+                                  <p:stCondLst>
+                                    <p:cond delay="0"/>
+                                  </p:stCondLst>
+                                  <p:childTnLst>
+                                    <p:set>
+                                      <p:cBhvr>
+                                        <p:cTn id="44" dur="1" fill="hold">
+                                          <p:stCondLst>
+                                            <p:cond delay="0"/>
+                                          </p:stCondLst>
+                                        </p:cTn>
+                                        <p:tgtEl>
+                                          <p:spTgt spid="11"/>
+                                        </p:tgtEl>
+                                        <p:attrNameLst>
+                                          <p:attrName>style.visibility</p:attrName>
+                                        </p:attrNameLst>
+                                      </p:cBhvr>
+                                      <p:to>
+                                        <p:strVal val="visible"/>
+                                      </p:to>
+                                    </p:set>
+                                    <p:animEffect transition="in" filter="wipe(down)">
+                                      <p:cBhvr>
+                                        <p:cTn id="45" dur="500"/>
+                                        <p:tgtEl>
+                                          <p:spTgt spid="11"/>
+                                        </p:tgtEl>
+                                      </p:cBhvr>
+                                    </p:animEffect>
+                                  </p:childTnLst>
+                                </p:cTn>
+                              </p:par>
+                            </p:childTnLst>
+                          </p:cTn>
+                        </p:par>
+                      </p:childTnLst>
+                    </p:cTn>
+                  </p:par>
+                  <p:par>
+                    <p:cTn id="46" fill="hold">
+                      <p:stCondLst>
+                        <p:cond delay="indefinite"/>
+                      </p:stCondLst>
+                      <p:childTnLst>
+                        <p:par>
+                          <p:cTn id="47" fill="hold">
+                            <p:stCondLst>
+                              <p:cond delay="0"/>
+                            </p:stCondLst>
+                            <p:childTnLst>
+                              <p:par>
+                                <p:cTn id="48" presetID="10" presetClass="entr" presetSubtype="0" fill="hold" nodeType="clickEffect">
+                                  <p:stCondLst>
+                                    <p:cond delay="0"/>
+                                  </p:stCondLst>
+                                  <p:childTnLst>
+                                    <p:set>
+                                      <p:cBhvr>
+                                        <p:cTn id="49" dur="1" fill="hold">
+                                          <p:stCondLst>
+                                            <p:cond delay="0"/>
+                                          </p:stCondLst>
+                                        </p:cTn>
+                                        <p:tgtEl>
+                                          <p:spTgt spid="6">
+                                            <p:txEl>
+                                              <p:pRg st="2" end="2"/>
+                                            </p:txEl>
+                                          </p:spTgt>
+                                        </p:tgtEl>
+                                        <p:attrNameLst>
+                                          <p:attrName>style.visibility</p:attrName>
+                                        </p:attrNameLst>
+                                      </p:cBhvr>
+                                      <p:to>
+                                        <p:strVal val="visible"/>
+                                      </p:to>
+                                    </p:set>
+                                    <p:animEffect transition="in" filter="fade">
+                                      <p:cBhvr>
+                                        <p:cTn id="50" dur="500"/>
+                                        <p:tgtEl>
+                                          <p:spTgt spid="6">
+                                            <p:txEl>
+                                              <p:pRg st="2" end="2"/>
+                                            </p:txEl>
+                                          </p:spTgt>
+                                        </p:tgtEl>
+                                      </p:cBhvr>
+                                    </p:animEffect>
+                                  </p:childTnLst>
+                                </p:cTn>
+                              </p:par>
+                            </p:childTnLst>
+                          </p:cTn>
+                        </p:par>
+                      </p:childTnLst>
+                    </p:cTn>
+                  </p:par>
+                  <p:par>
+                    <p:cTn id="51" fill="hold">
+                      <p:stCondLst>
+                        <p:cond delay="indefinite"/>
+                      </p:stCondLst>
+                      <p:childTnLst>
+                        <p:par>
+                          <p:cTn id="52" fill="hold">
+                            <p:stCondLst>
+                              <p:cond delay="0"/>
+                            </p:stCondLst>
+                            <p:childTnLst>
+                              <p:par>
+                                <p:cTn id="53" presetID="16" presetClass="entr" presetSubtype="21" fill="hold" nodeType="clickEffect">
+                                  <p:stCondLst>
+                                    <p:cond delay="0"/>
+                                  </p:stCondLst>
+                                  <p:childTnLst>
+                                    <p:set>
+                                      <p:cBhvr>
+                                        <p:cTn id="54" dur="1" fill="hold">
+                                          <p:stCondLst>
+                                            <p:cond delay="0"/>
+                                          </p:stCondLst>
+                                        </p:cTn>
+                                        <p:tgtEl>
+                                          <p:spTgt spid="17"/>
+                                        </p:tgtEl>
+                                        <p:attrNameLst>
+                                          <p:attrName>style.visibility</p:attrName>
+                                        </p:attrNameLst>
+                                      </p:cBhvr>
+                                      <p:to>
+                                        <p:strVal val="visible"/>
+                                      </p:to>
+                                    </p:set>
+                                    <p:animEffect transition="in" filter="barn(inVertical)">
+                                      <p:cBhvr>
+                                        <p:cTn id="55" dur="500"/>
+                                        <p:tgtEl>
+                                          <p:spTgt spid="17"/>
+                                        </p:tgtEl>
+                                      </p:cBhvr>
+                                    </p:animEffect>
+                                  </p:childTnLst>
+                                </p:cTn>
+                              </p:par>
+                            </p:childTnLst>
+                          </p:cTn>
+                        </p:par>
+                      </p:childTnLst>
+                    </p:cTn>
+                  </p:par>
+                  <p:par>
+                    <p:cTn id="56" fill="hold">
+                      <p:stCondLst>
+                        <p:cond delay="indefinite"/>
+                      </p:stCondLst>
+                      <p:childTnLst>
+                        <p:par>
+                          <p:cTn id="57" fill="hold">
+                            <p:stCondLst>
+                              <p:cond delay="0"/>
+                            </p:stCondLst>
+                            <p:childTnLst>
+                              <p:par>
+                                <p:cTn id="58" presetID="2" presetClass="entr" presetSubtype="4" fill="hold" nodeType="clickEffect">
+                                  <p:stCondLst>
+                                    <p:cond delay="0"/>
+                                  </p:stCondLst>
+                                  <p:childTnLst>
+                                    <p:set>
+                                      <p:cBhvr>
+                                        <p:cTn id="59" dur="1" fill="hold">
+                                          <p:stCondLst>
+                                            <p:cond delay="0"/>
+                                          </p:stCondLst>
+                                        </p:cTn>
+                                        <p:tgtEl>
+                                          <p:spTgt spid="4">
+                                            <p:txEl>
+                                              <p:pRg st="3" end="3"/>
+                                            </p:txEl>
+                                          </p:spTgt>
+                                        </p:tgtEl>
+                                        <p:attrNameLst>
+                                          <p:attrName>style.visibility</p:attrName>
+                                        </p:attrNameLst>
+                                      </p:cBhvr>
+                                      <p:to>
+                                        <p:strVal val="visible"/>
+                                      </p:to>
+                                    </p:set>
+                                    <p:anim calcmode="lin" valueType="num">
+                                      <p:cBhvr additive="base">
+                                        <p:cTn id="60" dur="500" fill="hold"/>
+                                        <p:tgtEl>
+                                          <p:spTgt spid="4">
+                                            <p:txEl>
+                                              <p:pRg st="3" end="3"/>
+                                            </p:txEl>
+                                          </p:spTgt>
+                                        </p:tgtEl>
+                                        <p:attrNameLst>
+                                          <p:attrName>ppt_x</p:attrName>
+                                        </p:attrNameLst>
+                                      </p:cBhvr>
+                                      <p:tavLst>
+                                        <p:tav tm="0">
+                                          <p:val>
+                                            <p:strVal val="#ppt_x"/>
+                                          </p:val>
+                                        </p:tav>
+                                        <p:tav tm="100000">
+                                          <p:val>
+                                            <p:strVal val="#ppt_x"/>
+                                          </p:val>
+                                        </p:tav>
+                                      </p:tavLst>
+                                    </p:anim>
+                                    <p:anim calcmode="lin" valueType="num">
+                                      <p:cBhvr additive="base">
+                                        <p:cTn id="61" dur="500" fill="hold"/>
+                                        <p:tgtEl>
+                                          <p:spTgt spid="4">
+                                            <p:txEl>
+                                              <p:pRg st="3" end="3"/>
+                                            </p:txEl>
+                                          </p:spTgt>
+                                        </p:tgtEl>
+                                        <p:attrNameLst>
+                                          <p:attrName>ppt_y</p:attrName>
+                                        </p:attrNameLst>
+                                      </p:cBhvr>
+                                      <p:tavLst>
+                                        <p:tav tm="0">
+                                          <p:val>
+                                            <p:strVal val="1+#ppt_h/2"/>
+                                          </p:val>
+                                        </p:tav>
+                                        <p:tav tm="100000">
+                                          <p:val>
+                                            <p:strVal val="#ppt_y"/>
+                                          </p:val>
+                                        </p:tav>
+                                      </p:tavLst>
+                                    </p:anim>
+                                  </p:childTnLst>
+                                </p:cTn>
+                              </p:par>
+                            </p:childTnLst>
+                          </p:cTn>
+                        </p:par>
+                      </p:childTnLst>
+                    </p:cTn>
+                  </p:par>
+                  <p:par>
+                    <p:cTn id="62" fill="hold">
+                      <p:stCondLst>
+                        <p:cond delay="indefinite"/>
+                      </p:stCondLst>
+                      <p:childTnLst>
+                        <p:par>
+                          <p:cTn id="63" fill="hold">
+                            <p:stCondLst>
+                              <p:cond delay="0"/>
+                            </p:stCondLst>
+                            <p:childTnLst>
+                              <p:par>
+                                <p:cTn id="64" presetID="22" presetClass="entr" presetSubtype="4" fill="hold" grpId="0" nodeType="clickEffect">
+                                  <p:stCondLst>
+                                    <p:cond delay="0"/>
+                                  </p:stCondLst>
+                                  <p:childTnLst>
+                                    <p:set>
+                                      <p:cBhvr>
+                                        <p:cTn id="65" dur="1" fill="hold">
+                                          <p:stCondLst>
+                                            <p:cond delay="0"/>
+                                          </p:stCondLst>
+                                        </p:cTn>
+                                        <p:tgtEl>
+                                          <p:spTgt spid="12"/>
+                                        </p:tgtEl>
+                                        <p:attrNameLst>
+                                          <p:attrName>style.visibility</p:attrName>
+                                        </p:attrNameLst>
+                                      </p:cBhvr>
+                                      <p:to>
+                                        <p:strVal val="visible"/>
+                                      </p:to>
+                                    </p:set>
+                                    <p:animEffect transition="in" filter="wipe(down)">
+                                      <p:cBhvr>
+                                        <p:cTn id="66" dur="500"/>
+                                        <p:tgtEl>
+                                          <p:spTgt spid="12"/>
+                                        </p:tgtEl>
+                                      </p:cBhvr>
+                                    </p:animEffect>
+                                  </p:childTnLst>
+                                </p:cTn>
+                              </p:par>
+                            </p:childTnLst>
+                          </p:cTn>
+                        </p:par>
+                      </p:childTnLst>
+                    </p:cTn>
+                  </p:par>
+                  <p:par>
+                    <p:cTn id="67" fill="hold">
+                      <p:stCondLst>
+                        <p:cond delay="indefinite"/>
+                      </p:stCondLst>
+                      <p:childTnLst>
+                        <p:par>
+                          <p:cTn id="68" fill="hold">
+                            <p:stCondLst>
+                              <p:cond delay="0"/>
+                            </p:stCondLst>
+                            <p:childTnLst>
+                              <p:par>
+                                <p:cTn id="69" presetID="10" presetClass="entr" presetSubtype="0" fill="hold" nodeType="clickEffect">
+                                  <p:stCondLst>
+                                    <p:cond delay="0"/>
+                                  </p:stCondLst>
+                                  <p:childTnLst>
+                                    <p:set>
+                                      <p:cBhvr>
+                                        <p:cTn id="70" dur="1" fill="hold">
+                                          <p:stCondLst>
+                                            <p:cond delay="0"/>
+                                          </p:stCondLst>
+                                        </p:cTn>
+                                        <p:tgtEl>
+                                          <p:spTgt spid="6">
+                                            <p:txEl>
+                                              <p:pRg st="3" end="3"/>
+                                            </p:txEl>
+                                          </p:spTgt>
+                                        </p:tgtEl>
+                                        <p:attrNameLst>
+                                          <p:attrName>style.visibility</p:attrName>
+                                        </p:attrNameLst>
+                                      </p:cBhvr>
+                                      <p:to>
+                                        <p:strVal val="visible"/>
+                                      </p:to>
+                                    </p:set>
+                                    <p:animEffect transition="in" filter="fade">
+                                      <p:cBhvr>
+                                        <p:cTn id="71" dur="500"/>
+                                        <p:tgtEl>
+                                          <p:spTgt spid="6">
+                                            <p:txEl>
+                                              <p:pRg st="3" end="3"/>
+                                            </p:txEl>
+                                          </p:spTgt>
+                                        </p:tgtEl>
+                                      </p:cBhvr>
+                                    </p:animEffect>
+                                  </p:childTnLst>
+                                </p:cTn>
+                              </p:par>
+                            </p:childTnLst>
+                          </p:cTn>
+                        </p:par>
+                      </p:childTnLst>
+                    </p:cTn>
+                  </p:par>
+                  <p:par>
+                    <p:cTn id="72" fill="hold">
+                      <p:stCondLst>
+                        <p:cond delay="indefinite"/>
+                      </p:stCondLst>
+                      <p:childTnLst>
+                        <p:par>
+                          <p:cTn id="73" fill="hold">
+                            <p:stCondLst>
+                              <p:cond delay="0"/>
+                            </p:stCondLst>
+                            <p:childTnLst>
+                              <p:par>
+                                <p:cTn id="74" presetID="16" presetClass="entr" presetSubtype="21" fill="hold" nodeType="clickEffect">
+                                  <p:stCondLst>
+                                    <p:cond delay="0"/>
+                                  </p:stCondLst>
+                                  <p:childTnLst>
+                                    <p:set>
+                                      <p:cBhvr>
+                                        <p:cTn id="75" dur="1" fill="hold">
+                                          <p:stCondLst>
+                                            <p:cond delay="0"/>
+                                          </p:stCondLst>
+                                        </p:cTn>
+                                        <p:tgtEl>
+                                          <p:spTgt spid="18"/>
+                                        </p:tgtEl>
+                                        <p:attrNameLst>
+                                          <p:attrName>style.visibility</p:attrName>
+                                        </p:attrNameLst>
+                                      </p:cBhvr>
+                                      <p:to>
+                                        <p:strVal val="visible"/>
+                                      </p:to>
+                                    </p:set>
+                                    <p:animEffect transition="in" filter="barn(inVertical)">
+                                      <p:cBhvr>
+                                        <p:cTn id="76" dur="500"/>
+                                        <p:tgtEl>
+                                          <p:spTgt spid="18"/>
+                                        </p:tgtEl>
+                                      </p:cBhvr>
+                                    </p:animEffect>
+                                  </p:childTnLst>
+                                </p:cTn>
+                              </p:par>
+                            </p:childTnLst>
+                          </p:cTn>
+                        </p:par>
+                      </p:childTnLst>
+                    </p:cTn>
+                  </p:par>
+                  <p:par>
+                    <p:cTn id="77" fill="hold">
+                      <p:stCondLst>
+                        <p:cond delay="indefinite"/>
+                      </p:stCondLst>
+                      <p:childTnLst>
+                        <p:par>
+                          <p:cTn id="78" fill="hold">
+                            <p:stCondLst>
+                              <p:cond delay="0"/>
+                            </p:stCondLst>
+                            <p:childTnLst>
+                              <p:par>
+                                <p:cTn id="79" presetID="2" presetClass="entr" presetSubtype="4" fill="hold" nodeType="clickEffect">
+                                  <p:stCondLst>
+                                    <p:cond delay="0"/>
+                                  </p:stCondLst>
+                                  <p:childTnLst>
+                                    <p:set>
+                                      <p:cBhvr>
+                                        <p:cTn id="80" dur="1" fill="hold">
+                                          <p:stCondLst>
+                                            <p:cond delay="0"/>
+                                          </p:stCondLst>
+                                        </p:cTn>
+                                        <p:tgtEl>
+                                          <p:spTgt spid="4">
+                                            <p:txEl>
+                                              <p:pRg st="4" end="4"/>
+                                            </p:txEl>
+                                          </p:spTgt>
+                                        </p:tgtEl>
+                                        <p:attrNameLst>
+                                          <p:attrName>style.visibility</p:attrName>
+                                        </p:attrNameLst>
+                                      </p:cBhvr>
+                                      <p:to>
+                                        <p:strVal val="visible"/>
+                                      </p:to>
+                                    </p:set>
+                                    <p:anim calcmode="lin" valueType="num">
+                                      <p:cBhvr additive="base">
+                                        <p:cTn id="81" dur="500" fill="hold"/>
+                                        <p:tgtEl>
+                                          <p:spTgt spid="4">
+                                            <p:txEl>
+                                              <p:pRg st="4" end="4"/>
+                                            </p:txEl>
+                                          </p:spTgt>
+                                        </p:tgtEl>
+                                        <p:attrNameLst>
+                                          <p:attrName>ppt_x</p:attrName>
+                                        </p:attrNameLst>
+                                      </p:cBhvr>
+                                      <p:tavLst>
+                                        <p:tav tm="0">
+                                          <p:val>
+                                            <p:strVal val="#ppt_x"/>
+                                          </p:val>
+                                        </p:tav>
+                                        <p:tav tm="100000">
+                                          <p:val>
+                                            <p:strVal val="#ppt_x"/>
+                                          </p:val>
+                                        </p:tav>
+                                      </p:tavLst>
+                                    </p:anim>
+                                    <p:anim calcmode="lin" valueType="num">
+                                      <p:cBhvr additive="base">
+                                        <p:cTn id="82" dur="500" fill="hold"/>
+                                        <p:tgtEl>
+                                          <p:spTgt spid="4">
+                                            <p:txEl>
+                                              <p:pRg st="4" end="4"/>
+                                            </p:txEl>
+                                          </p:spTgt>
+                                        </p:tgtEl>
+                                        <p:attrNameLst>
+                                          <p:attrName>ppt_y</p:attrName>
+                                        </p:attrNameLst>
+                                      </p:cBhvr>
+                                      <p:tavLst>
+                                        <p:tav tm="0">
+                                          <p:val>
+                                            <p:strVal val="1+#ppt_h/2"/>
+                                          </p:val>
+                                        </p:tav>
+                                        <p:tav tm="100000">
+                                          <p:val>
+                                            <p:strVal val="#ppt_y"/>
+                                          </p:val>
+                                        </p:tav>
+                                      </p:tavLst>
+                                    </p:anim>
+                                  </p:childTnLst>
+                                </p:cTn>
+                              </p:par>
+                            </p:childTnLst>
+                          </p:cTn>
+                        </p:par>
+                      </p:childTnLst>
+                    </p:cTn>
+                  </p:par>
+                  <p:par>
+                    <p:cTn id="83" fill="hold">
+                      <p:stCondLst>
+                        <p:cond delay="indefinite"/>
+                      </p:stCondLst>
+                      <p:childTnLst>
+                        <p:par>
+                          <p:cTn id="84" fill="hold">
+                            <p:stCondLst>
+                              <p:cond delay="0"/>
+                            </p:stCondLst>
+                            <p:childTnLst>
+                              <p:par>
+                                <p:cTn id="85" presetID="22" presetClass="entr" presetSubtype="4" fill="hold" grpId="0" nodeType="clickEffect">
+                                  <p:stCondLst>
+                                    <p:cond delay="0"/>
+                                  </p:stCondLst>
+                                  <p:childTnLst>
+                                    <p:set>
+                                      <p:cBhvr>
+                                        <p:cTn id="86" dur="1" fill="hold">
+                                          <p:stCondLst>
+                                            <p:cond delay="0"/>
+                                          </p:stCondLst>
+                                        </p:cTn>
+                                        <p:tgtEl>
+                                          <p:spTgt spid="13"/>
+                                        </p:tgtEl>
+                                        <p:attrNameLst>
+                                          <p:attrName>style.visibility</p:attrName>
+                                        </p:attrNameLst>
+                                      </p:cBhvr>
+                                      <p:to>
+                                        <p:strVal val="visible"/>
+                                      </p:to>
+                                    </p:set>
+                                    <p:animEffect transition="in" filter="wipe(down)">
+                                      <p:cBhvr>
+                                        <p:cTn id="87" dur="500"/>
+                                        <p:tgtEl>
+                                          <p:spTgt spid="13"/>
+                                        </p:tgtEl>
+                                      </p:cBhvr>
+                                    </p:animEffect>
+                                  </p:childTnLst>
+                                </p:cTn>
+                              </p:par>
+                            </p:childTnLst>
+                          </p:cTn>
+                        </p:par>
+                      </p:childTnLst>
+                    </p:cTn>
+                  </p:par>
+                  <p:par>
+                    <p:cTn id="88" fill="hold">
+                      <p:stCondLst>
+                        <p:cond delay="indefinite"/>
+                      </p:stCondLst>
+                      <p:childTnLst>
+                        <p:par>
+                          <p:cTn id="89" fill="hold">
+                            <p:stCondLst>
+                              <p:cond delay="0"/>
+                            </p:stCondLst>
+                            <p:childTnLst>
+                              <p:par>
+                                <p:cTn id="90" presetID="10" presetClass="entr" presetSubtype="0" fill="hold" nodeType="clickEffect">
+                                  <p:stCondLst>
+                                    <p:cond delay="0"/>
+                                  </p:stCondLst>
+                                  <p:childTnLst>
+                                    <p:set>
+                                      <p:cBhvr>
+                                        <p:cTn id="91" dur="1" fill="hold">
+                                          <p:stCondLst>
+                                            <p:cond delay="0"/>
+                                          </p:stCondLst>
+                                        </p:cTn>
+                                        <p:tgtEl>
+                                          <p:spTgt spid="6">
+                                            <p:txEl>
+                                              <p:pRg st="4" end="4"/>
+                                            </p:txEl>
+                                          </p:spTgt>
+                                        </p:tgtEl>
+                                        <p:attrNameLst>
+                                          <p:attrName>style.visibility</p:attrName>
+                                        </p:attrNameLst>
+                                      </p:cBhvr>
+                                      <p:to>
+                                        <p:strVal val="visible"/>
+                                      </p:to>
+                                    </p:set>
+                                    <p:animEffect transition="in" filter="fade">
+                                      <p:cBhvr>
+                                        <p:cTn id="92" dur="500"/>
+                                        <p:tgtEl>
+                                          <p:spTgt spid="6">
+                                            <p:txEl>
+                                              <p:pRg st="4" end="4"/>
+                                            </p:txEl>
+                                          </p:spTgt>
+                                        </p:tgtEl>
+                                      </p:cBhvr>
+                                    </p:animEffect>
+                                  </p:childTnLst>
+                                </p:cTn>
+                              </p:par>
+                            </p:childTnLst>
+                          </p:cTn>
+                        </p:par>
+                      </p:childTnLst>
+                    </p:cTn>
+                  </p:par>
+                  <p:par>
+                    <p:cTn id="93" fill="hold">
+                      <p:stCondLst>
+                        <p:cond delay="indefinite"/>
+                      </p:stCondLst>
+                      <p:childTnLst>
+                        <p:par>
+                          <p:cTn id="94" fill="hold">
+                            <p:stCondLst>
+                              <p:cond delay="0"/>
+                            </p:stCondLst>
+                            <p:childTnLst>
+                              <p:par>
+                                <p:cTn id="95" presetID="2" presetClass="entr" presetSubtype="4" fill="hold" nodeType="clickEffect">
+                                  <p:stCondLst>
+                                    <p:cond delay="0"/>
+                                  </p:stCondLst>
+                                  <p:childTnLst>
+                                    <p:set>
+                                      <p:cBhvr>
+                                        <p:cTn id="96" dur="1" fill="hold">
+                                          <p:stCondLst>
+                                            <p:cond delay="0"/>
+                                          </p:stCondLst>
+                                        </p:cTn>
+                                        <p:tgtEl>
+                                          <p:spTgt spid="4">
+                                            <p:txEl>
+                                              <p:pRg st="5" end="5"/>
+                                            </p:txEl>
+                                          </p:spTgt>
+                                        </p:tgtEl>
+                                        <p:attrNameLst>
+                                          <p:attrName>style.visibility</p:attrName>
+                                        </p:attrNameLst>
+                                      </p:cBhvr>
+                                      <p:to>
+                                        <p:strVal val="visible"/>
+                                      </p:to>
+                                    </p:set>
+                                    <p:anim calcmode="lin" valueType="num">
+                                      <p:cBhvr additive="base">
+                                        <p:cTn id="97" dur="500" fill="hold"/>
+                                        <p:tgtEl>
+                                          <p:spTgt spid="4">
+                                            <p:txEl>
+                                              <p:pRg st="5" end="5"/>
+                                            </p:txEl>
+                                          </p:spTgt>
+                                        </p:tgtEl>
+                                        <p:attrNameLst>
+                                          <p:attrName>ppt_x</p:attrName>
+                                        </p:attrNameLst>
+                                      </p:cBhvr>
+                                      <p:tavLst>
+                                        <p:tav tm="0">
+                                          <p:val>
+                                            <p:strVal val="#ppt_x"/>
+                                          </p:val>
+                                        </p:tav>
+                                        <p:tav tm="100000">
+                                          <p:val>
+                                            <p:strVal val="#ppt_x"/>
+                                          </p:val>
+                                        </p:tav>
+                                      </p:tavLst>
+                                    </p:anim>
+                                    <p:anim calcmode="lin" valueType="num">
+                                      <p:cBhvr additive="base">
+                                        <p:cTn id="98" dur="500" fill="hold"/>
+                                        <p:tgtEl>
+                                          <p:spTgt spid="4">
+                                            <p:txEl>
+                                              <p:pRg st="5" end="5"/>
+                                            </p:txEl>
+                                          </p:spTgt>
+                                        </p:tgtEl>
+                                        <p:attrNameLst>
+                                          <p:attrName>ppt_y</p:attrName>
+                                        </p:attrNameLst>
+                                      </p:cBhvr>
+                                      <p:tavLst>
+                                        <p:tav tm="0">
+                                          <p:val>
+                                            <p:strVal val="1+#ppt_h/2"/>
+                                          </p:val>
+                                        </p:tav>
+                                        <p:tav tm="100000">
+                                          <p:val>
+                                            <p:strVal val="#ppt_y"/>
+                                          </p:val>
+                                        </p:tav>
+                                      </p:tavLst>
+                                    </p:anim>
+                                  </p:childTnLst>
+                                </p:cTn>
+                              </p:par>
+                            </p:childTnLst>
+                          </p:cTn>
+                        </p:par>
+                      </p:childTnLst>
+                    </p:cTn>
+                  </p:par>
+                  <p:par>
+                    <p:cTn id="99" fill="hold">
+                      <p:stCondLst>
+                        <p:cond delay="indefinite"/>
+                      </p:stCondLst>
+                      <p:childTnLst>
+                        <p:par>
+                          <p:cTn id="100" fill="hold">
+                            <p:stCondLst>
+                              <p:cond delay="0"/>
+                            </p:stCondLst>
+                            <p:childTnLst>
+                              <p:par>
+                                <p:cTn id="101" presetID="22" presetClass="entr" presetSubtype="4" fill="hold" grpId="0" nodeType="clickEffect">
+                                  <p:stCondLst>
+                                    <p:cond delay="0"/>
+                                  </p:stCondLst>
+                                  <p:childTnLst>
+                                    <p:set>
+                                      <p:cBhvr>
+                                        <p:cTn id="102" dur="1" fill="hold">
+                                          <p:stCondLst>
+                                            <p:cond delay="0"/>
+                                          </p:stCondLst>
+                                        </p:cTn>
+                                        <p:tgtEl>
+                                          <p:spTgt spid="14"/>
+                                        </p:tgtEl>
+                                        <p:attrNameLst>
+                                          <p:attrName>style.visibility</p:attrName>
+                                        </p:attrNameLst>
+                                      </p:cBhvr>
+                                      <p:to>
+                                        <p:strVal val="visible"/>
+                                      </p:to>
+                                    </p:set>
+                                    <p:animEffect transition="in" filter="wipe(down)">
+                                      <p:cBhvr>
+                                        <p:cTn id="103" dur="500"/>
+                                        <p:tgtEl>
+                                          <p:spTgt spid="14"/>
+                                        </p:tgtEl>
+                                      </p:cBhvr>
+                                    </p:animEffect>
+                                  </p:childTnLst>
+                                </p:cTn>
+                              </p:par>
+                            </p:childTnLst>
+                          </p:cTn>
+                        </p:par>
+                      </p:childTnLst>
+                    </p:cTn>
+                  </p:par>
+                  <p:par>
+                    <p:cTn id="104" fill="hold">
+                      <p:stCondLst>
+                        <p:cond delay="indefinite"/>
+                      </p:stCondLst>
+                      <p:childTnLst>
+                        <p:par>
+                          <p:cTn id="105" fill="hold">
+                            <p:stCondLst>
+                              <p:cond delay="0"/>
+                            </p:stCondLst>
+                            <p:childTnLst>
+                              <p:par>
+                                <p:cTn id="106" presetID="10" presetClass="entr" presetSubtype="0" fill="hold" nodeType="clickEffect">
+                                  <p:stCondLst>
+                                    <p:cond delay="0"/>
+                                  </p:stCondLst>
+                                  <p:childTnLst>
+                                    <p:set>
+                                      <p:cBhvr>
+                                        <p:cTn id="107" dur="1" fill="hold">
+                                          <p:stCondLst>
+                                            <p:cond delay="0"/>
+                                          </p:stCondLst>
+                                        </p:cTn>
+                                        <p:tgtEl>
+                                          <p:spTgt spid="6">
+                                            <p:txEl>
+                                              <p:pRg st="5" end="5"/>
+                                            </p:txEl>
+                                          </p:spTgt>
+                                        </p:tgtEl>
+                                        <p:attrNameLst>
+                                          <p:attrName>style.visibility</p:attrName>
+                                        </p:attrNameLst>
+                                      </p:cBhvr>
+                                      <p:to>
+                                        <p:strVal val="visible"/>
+                                      </p:to>
+                                    </p:set>
+                                    <p:animEffect transition="in" filter="fade">
+                                      <p:cBhvr>
+                                        <p:cTn id="108" dur="500"/>
+                                        <p:tgtEl>
+                                          <p:spTgt spid="6">
+                                            <p:txEl>
+                                              <p:pRg st="5" end="5"/>
+                                            </p:txEl>
+                                          </p:spTgt>
+                                        </p:tgtEl>
+                                      </p:cBhvr>
+                                    </p:animEffect>
+                                  </p:childTnLst>
+                                </p:cTn>
+                              </p:par>
+                            </p:childTnLst>
+                          </p:cTn>
+                        </p:par>
+                      </p:childTnLst>
+                    </p:cTn>
+                  </p:par>
+                  <p:par>
+                    <p:cTn id="109" fill="hold">
+                      <p:stCondLst>
+                        <p:cond delay="indefinite"/>
+                      </p:stCondLst>
+                      <p:childTnLst>
+                        <p:par>
+                          <p:cTn id="110" fill="hold">
+                            <p:stCondLst>
+                              <p:cond delay="0"/>
+                            </p:stCondLst>
+                            <p:childTnLst>
+                              <p:par>
+                                <p:cTn id="111" presetID="2" presetClass="entr" presetSubtype="4" fill="hold" nodeType="clickEffect">
+                                  <p:stCondLst>
+                                    <p:cond delay="0"/>
+                                  </p:stCondLst>
+                                  <p:childTnLst>
+                                    <p:set>
+                                      <p:cBhvr>
+                                        <p:cTn id="112" dur="1" fill="hold">
+                                          <p:stCondLst>
+                                            <p:cond delay="0"/>
+                                          </p:stCondLst>
+                                        </p:cTn>
+                                        <p:tgtEl>
+                                          <p:spTgt spid="4">
+                                            <p:txEl>
+                                              <p:pRg st="7" end="7"/>
+                                            </p:txEl>
+                                          </p:spTgt>
+                                        </p:tgtEl>
+                                        <p:attrNameLst>
+                                          <p:attrName>style.visibility</p:attrName>
+                                        </p:attrNameLst>
+                                      </p:cBhvr>
+                                      <p:to>
+                                        <p:strVal val="visible"/>
+                                      </p:to>
+                                    </p:set>
+                                    <p:anim calcmode="lin" valueType="num">
+                                      <p:cBhvr additive="base">
+                                        <p:cTn id="113" dur="500" fill="hold"/>
+                                        <p:tgtEl>
+                                          <p:spTgt spid="4">
+                                            <p:txEl>
+                                              <p:pRg st="7" end="7"/>
+                                            </p:txEl>
+                                          </p:spTgt>
+                                        </p:tgtEl>
+                                        <p:attrNameLst>
+                                          <p:attrName>ppt_x</p:attrName>
+                                        </p:attrNameLst>
+                                      </p:cBhvr>
+                                      <p:tavLst>
+                                        <p:tav tm="0">
+                                          <p:val>
+                                            <p:strVal val="#ppt_x"/>
+                                          </p:val>
+                                        </p:tav>
+                                        <p:tav tm="100000">
+                                          <p:val>
+                                            <p:strVal val="#ppt_x"/>
+                                          </p:val>
+                                        </p:tav>
+                                      </p:tavLst>
+                                    </p:anim>
+                                    <p:anim calcmode="lin" valueType="num">
+                                      <p:cBhvr additive="base">
+                                        <p:cTn id="114" dur="500" fill="hold"/>
+                                        <p:tgtEl>
+                                          <p:spTgt spid="4">
+                                            <p:txEl>
+                                              <p:pRg st="7" end="7"/>
+                                            </p:txEl>
+                                          </p:spTgt>
+                                        </p:tgtEl>
+                                        <p:attrNameLst>
+                                          <p:attrName>ppt_y</p:attrName>
+                                        </p:attrNameLst>
+                                      </p:cBhvr>
+                                      <p:tavLst>
+                                        <p:tav tm="0">
+                                          <p:val>
+                                            <p:strVal val="1+#ppt_h/2"/>
+                                          </p:val>
+                                        </p:tav>
+                                        <p:tav tm="100000">
+                                          <p:val>
+                                            <p:strVal val="#ppt_y"/>
+                                          </p:val>
+                                        </p:tav>
+                                      </p:tavLst>
+                                    </p:anim>
+                                  </p:childTnLst>
+                                </p:cTn>
+                              </p:par>
+                            </p:childTnLst>
+                          </p:cTn>
+                        </p:par>
+                      </p:childTnLst>
+                    </p:cTn>
+                  </p:par>
+                </p:childTnLst>
+              </p:cTn>
+              <p:prevCondLst>
+                <p:cond evt="onPrev" delay="0">
+                  <p:tgtEl>
+                    <p:sldTgt/>
+                  </p:tgtEl>
+                </p:cond>
+              </p:prevCondLst>
+              <p:nextCondLst>
+                <p:cond evt="onNext" delay="0">
+                  <p:tgtEl>
+                    <p:sldTgt/>
+                  </p:tgtEl>
+                </p:cond>
+              </p:nextCondLst>
+            </p:seq>
+          </p:childTnLst>
+        </p:cTn>
+      </p:par>
+    </p:tnLst>
+    <p:bldLst>
+      <p:bldP spid="9" grpId="0" animBg="1"/>
+      <p:bldP spid="10" grpId="0" animBg="1"/>
+      <p:bldP spid="11" grpId="0" animBg="1"/>
+      <p:bldP spid="12" grpId="0" animBg="1"/>
+      <p:bldP spid="13" grpId="0" animBg="1"/>
+      <p:bldP spid="14" grpId="0" animBg="1"/>
+    </p:bldLst>
+  </p:timing>
 </p:sld>
 </file>
 
